--- a/public/documents/business-simulation/round-4/section-c/section-c-round4-universe2-debrief.pptx
+++ b/public/documents/business-simulation/round-4/section-c/section-c-round4-universe2-debrief.pptx
@@ -508,6 +508,10 @@
           </p:nvPr>
         </p:nvSpPr>
         <p:spPr/>
+        <p:txBody>
+          <a:bodyPr/>
+          <a:p/>
+        </p:txBody>
       </p:sp>
       <p:sp>
         <p:nvSpPr>
@@ -524,10 +528,6 @@
           <a:bodyPr/>
           <a:lstStyle/>
           <a:p>
-            <a:r>
-              <a:rPr lang="en-US" dirty="0"/>
-              <a:t>Opening frame. Ask the class to treat rank as the entry point, not the answer. The discussion will move from results to causal mechanisms and then to Round 5 decision rules.</a:t>
-            </a:r>
             <a:endParaRPr lang="en-US" dirty="0"/>
           </a:p>
         </p:txBody>
@@ -547,10 +547,6 @@
           <a:bodyPr/>
           <a:lstStyle/>
           <a:p>
-            <a:fld id="{F7021451-1387-4CA6-816F-3879F97B5CBC}" type="slidenum">
-              <a:rPr lang="en-US"/>
-              <a:t>1</a:t>
-            </a:fld>
             <a:endParaRPr lang="en-US"/>
           </a:p>
         </p:txBody>
@@ -596,6 +592,10 @@
           </p:nvPr>
         </p:nvSpPr>
         <p:spPr/>
+        <p:txBody>
+          <a:bodyPr/>
+          <a:p/>
+        </p:txBody>
       </p:sp>
       <p:sp>
         <p:nvSpPr>
@@ -612,10 +612,6 @@
           <a:bodyPr/>
           <a:lstStyle/>
           <a:p>
-            <a:r>
-              <a:rPr lang="en-US" dirty="0"/>
-              <a:t>Ask teams to identify not only where they have share, but where they earn returns. Regional share is only useful if it creates contribution and capacity fit.</a:t>
-            </a:r>
             <a:endParaRPr lang="en-US" dirty="0"/>
           </a:p>
         </p:txBody>
@@ -635,10 +631,6 @@
           <a:bodyPr/>
           <a:lstStyle/>
           <a:p>
-            <a:fld id="{F7021451-1387-4CA6-816F-3879F97B5CBC}" type="slidenum">
-              <a:rPr lang="en-US"/>
-              <a:t>10</a:t>
-            </a:fld>
             <a:endParaRPr lang="en-US"/>
           </a:p>
         </p:txBody>
@@ -684,6 +676,10 @@
           </p:nvPr>
         </p:nvSpPr>
         <p:spPr/>
+        <p:txBody>
+          <a:bodyPr/>
+          <a:p/>
+        </p:txBody>
       </p:sp>
       <p:sp>
         <p:nvSpPr>
@@ -700,10 +696,6 @@
           <a:bodyPr/>
           <a:lstStyle/>
           <a:p>
-            <a:r>
-              <a:rPr lang="en-US" dirty="0"/>
-              <a:t>Do not let students equate innovation with spending. Ask them to specify the path from R&amp;D to demand and contribution.</a:t>
-            </a:r>
             <a:endParaRPr lang="en-US" dirty="0"/>
           </a:p>
         </p:txBody>
@@ -723,10 +715,6 @@
           <a:bodyPr/>
           <a:lstStyle/>
           <a:p>
-            <a:fld id="{F7021451-1387-4CA6-816F-3879F97B5CBC}" type="slidenum">
-              <a:rPr lang="en-US"/>
-              <a:t>11</a:t>
-            </a:fld>
             <a:endParaRPr lang="en-US"/>
           </a:p>
         </p:txBody>
@@ -772,6 +760,10 @@
           </p:nvPr>
         </p:nvSpPr>
         <p:spPr/>
+        <p:txBody>
+          <a:bodyPr/>
+          <a:p/>
+        </p:txBody>
       </p:sp>
       <p:sp>
         <p:nvSpPr>
@@ -788,10 +780,6 @@
           <a:bodyPr/>
           <a:lstStyle/>
           <a:p>
-            <a:r>
-              <a:rPr lang="en-US" dirty="0"/>
-              <a:t>This is a useful team challenge slide. Ask each team to explain whether its weak ROS is price, cost, R&amp;D or financing related.</a:t>
-            </a:r>
             <a:endParaRPr lang="en-US" dirty="0"/>
           </a:p>
         </p:txBody>
@@ -811,10 +799,6 @@
           <a:bodyPr/>
           <a:lstStyle/>
           <a:p>
-            <a:fld id="{F7021451-1387-4CA6-816F-3879F97B5CBC}" type="slidenum">
-              <a:rPr lang="en-US"/>
-              <a:t>12</a:t>
-            </a:fld>
             <a:endParaRPr lang="en-US"/>
           </a:p>
         </p:txBody>
@@ -860,6 +844,10 @@
           </p:nvPr>
         </p:nvSpPr>
         <p:spPr/>
+        <p:txBody>
+          <a:bodyPr/>
+          <a:p/>
+        </p:txBody>
       </p:sp>
       <p:sp>
         <p:nvSpPr>
@@ -876,10 +864,6 @@
           <a:bodyPr/>
           <a:lstStyle/>
           <a:p>
-            <a:r>
-              <a:rPr lang="en-US" dirty="0"/>
-              <a:t>Emphasize that inventory connects forecasting, pricing, production and cash. A team with profit but poor cash flow may have a timing or inventory problem.</a:t>
-            </a:r>
             <a:endParaRPr lang="en-US" dirty="0"/>
           </a:p>
         </p:txBody>
@@ -899,10 +883,6 @@
           <a:bodyPr/>
           <a:lstStyle/>
           <a:p>
-            <a:fld id="{F7021451-1387-4CA6-816F-3879F97B5CBC}" type="slidenum">
-              <a:rPr lang="en-US"/>
-              <a:t>13</a:t>
-            </a:fld>
             <a:endParaRPr lang="en-US"/>
           </a:p>
         </p:txBody>
@@ -948,6 +928,10 @@
           </p:nvPr>
         </p:nvSpPr>
         <p:spPr/>
+        <p:txBody>
+          <a:bodyPr/>
+          <a:p/>
+        </p:txBody>
       </p:sp>
       <p:sp>
         <p:nvSpPr>
@@ -964,10 +948,6 @@
           <a:bodyPr/>
           <a:lstStyle/>
           <a:p>
-            <a:r>
-              <a:rPr lang="en-US" dirty="0"/>
-              <a:t>Use this slide to explain the connection between financing decisions and TSR. Debt is not automatically bad; unplanned debt and deteriorating credit quality are the problem.</a:t>
-            </a:r>
             <a:endParaRPr lang="en-US" dirty="0"/>
           </a:p>
         </p:txBody>
@@ -987,10 +967,6 @@
           <a:bodyPr/>
           <a:lstStyle/>
           <a:p>
-            <a:fld id="{F7021451-1387-4CA6-816F-3879F97B5CBC}" type="slidenum">
-              <a:rPr lang="en-US"/>
-              <a:t>14</a:t>
-            </a:fld>
             <a:endParaRPr lang="en-US"/>
           </a:p>
         </p:txBody>
@@ -1036,6 +1012,10 @@
           </p:nvPr>
         </p:nvSpPr>
         <p:spPr/>
+        <p:txBody>
+          <a:bodyPr/>
+          <a:p/>
+        </p:txBody>
       </p:sp>
       <p:sp>
         <p:nvSpPr>
@@ -1052,10 +1032,6 @@
           <a:bodyPr/>
           <a:lstStyle/>
           <a:p>
-            <a:r>
-              <a:rPr lang="en-US" dirty="0"/>
-              <a:t>This slide is a synthesis. Invite each team to pick the cell that best explains its result, and the cell it must fix before Round 5.</a:t>
-            </a:r>
             <a:endParaRPr lang="en-US" dirty="0"/>
           </a:p>
         </p:txBody>
@@ -1075,10 +1051,6 @@
           <a:bodyPr/>
           <a:lstStyle/>
           <a:p>
-            <a:fld id="{F7021451-1387-4CA6-816F-3879F97B5CBC}" type="slidenum">
-              <a:rPr lang="en-US"/>
-              <a:t>15</a:t>
-            </a:fld>
             <a:endParaRPr lang="en-US"/>
           </a:p>
         </p:txBody>
@@ -1124,6 +1096,10 @@
           </p:nvPr>
         </p:nvSpPr>
         <p:spPr/>
+        <p:txBody>
+          <a:bodyPr/>
+          <a:p/>
+        </p:txBody>
       </p:sp>
       <p:sp>
         <p:nvSpPr>
@@ -1140,10 +1116,6 @@
           <a:bodyPr/>
           <a:lstStyle/>
           <a:p>
-            <a:r>
-              <a:rPr lang="en-US" dirty="0"/>
-              <a:t>Team profile for Green. Emphasize the distinction between result and learning. Ask the team for one preserved decision and one corrective decision.</a:t>
-            </a:r>
             <a:endParaRPr lang="en-US" dirty="0"/>
           </a:p>
         </p:txBody>
@@ -1163,10 +1135,6 @@
           <a:bodyPr/>
           <a:lstStyle/>
           <a:p>
-            <a:fld id="{F7021451-1387-4CA6-816F-3879F97B5CBC}" type="slidenum">
-              <a:rPr lang="en-US"/>
-              <a:t>16</a:t>
-            </a:fld>
             <a:endParaRPr lang="en-US"/>
           </a:p>
         </p:txBody>
@@ -1212,6 +1180,10 @@
           </p:nvPr>
         </p:nvSpPr>
         <p:spPr/>
+        <p:txBody>
+          <a:bodyPr/>
+          <a:p/>
+        </p:txBody>
       </p:sp>
       <p:sp>
         <p:nvSpPr>
@@ -1228,10 +1200,6 @@
           <a:bodyPr/>
           <a:lstStyle/>
           <a:p>
-            <a:r>
-              <a:rPr lang="en-US" dirty="0"/>
-              <a:t>Team profile for Satyam 2.0. Emphasize the distinction between result and learning. Ask the team for one preserved decision and one corrective decision.</a:t>
-            </a:r>
             <a:endParaRPr lang="en-US" dirty="0"/>
           </a:p>
         </p:txBody>
@@ -1251,10 +1219,6 @@
           <a:bodyPr/>
           <a:lstStyle/>
           <a:p>
-            <a:fld id="{F7021451-1387-4CA6-816F-3879F97B5CBC}" type="slidenum">
-              <a:rPr lang="en-US"/>
-              <a:t>17</a:t>
-            </a:fld>
             <a:endParaRPr lang="en-US"/>
           </a:p>
         </p:txBody>
@@ -1300,6 +1264,10 @@
           </p:nvPr>
         </p:nvSpPr>
         <p:spPr/>
+        <p:txBody>
+          <a:bodyPr/>
+          <a:p/>
+        </p:txBody>
       </p:sp>
       <p:sp>
         <p:nvSpPr>
@@ -1316,10 +1284,6 @@
           <a:bodyPr/>
           <a:lstStyle/>
           <a:p>
-            <a:r>
-              <a:rPr lang="en-US" dirty="0"/>
-              <a:t>Team profile for Blues Clues. Emphasize the distinction between result and learning. Ask the team for one preserved decision and one corrective decision.</a:t>
-            </a:r>
             <a:endParaRPr lang="en-US" dirty="0"/>
           </a:p>
         </p:txBody>
@@ -1339,10 +1303,6 @@
           <a:bodyPr/>
           <a:lstStyle/>
           <a:p>
-            <a:fld id="{F7021451-1387-4CA6-816F-3879F97B5CBC}" type="slidenum">
-              <a:rPr lang="en-US"/>
-              <a:t>18</a:t>
-            </a:fld>
             <a:endParaRPr lang="en-US"/>
           </a:p>
         </p:txBody>
@@ -1388,6 +1348,10 @@
           </p:nvPr>
         </p:nvSpPr>
         <p:spPr/>
+        <p:txBody>
+          <a:bodyPr/>
+          <a:p/>
+        </p:txBody>
       </p:sp>
       <p:sp>
         <p:nvSpPr>
@@ -1404,10 +1368,6 @@
           <a:bodyPr/>
           <a:lstStyle/>
           <a:p>
-            <a:r>
-              <a:rPr lang="en-US" dirty="0"/>
-              <a:t>Team profile for Lehman Bros.. Emphasize the distinction between result and learning. Ask the team for one preserved decision and one corrective decision.</a:t>
-            </a:r>
             <a:endParaRPr lang="en-US" dirty="0"/>
           </a:p>
         </p:txBody>
@@ -1427,10 +1387,6 @@
           <a:bodyPr/>
           <a:lstStyle/>
           <a:p>
-            <a:fld id="{F7021451-1387-4CA6-816F-3879F97B5CBC}" type="slidenum">
-              <a:rPr lang="en-US"/>
-              <a:t>19</a:t>
-            </a:fld>
             <a:endParaRPr lang="en-US"/>
           </a:p>
         </p:txBody>
@@ -1476,6 +1432,10 @@
           </p:nvPr>
         </p:nvSpPr>
         <p:spPr/>
+        <p:txBody>
+          <a:bodyPr/>
+          <a:p/>
+        </p:txBody>
       </p:sp>
       <p:sp>
         <p:nvSpPr>
@@ -1492,10 +1452,6 @@
           <a:bodyPr/>
           <a:lstStyle/>
           <a:p>
-            <a:r>
-              <a:rPr lang="en-US" dirty="0"/>
-              <a:t>Use this slide to discipline the conversation. Teams must compare like with like, especially when names changed. The ranking metric is cumulative TSR, but the explanation is multi-metric.</a:t>
-            </a:r>
             <a:endParaRPr lang="en-US" dirty="0"/>
           </a:p>
         </p:txBody>
@@ -1515,10 +1471,6 @@
           <a:bodyPr/>
           <a:lstStyle/>
           <a:p>
-            <a:fld id="{F7021451-1387-4CA6-816F-3879F97B5CBC}" type="slidenum">
-              <a:rPr lang="en-US"/>
-              <a:t>2</a:t>
-            </a:fld>
             <a:endParaRPr lang="en-US"/>
           </a:p>
         </p:txBody>
@@ -1564,6 +1516,10 @@
           </p:nvPr>
         </p:nvSpPr>
         <p:spPr/>
+        <p:txBody>
+          <a:bodyPr/>
+          <a:p/>
+        </p:txBody>
       </p:sp>
       <p:sp>
         <p:nvSpPr>
@@ -1580,10 +1536,6 @@
           <a:bodyPr/>
           <a:lstStyle/>
           <a:p>
-            <a:r>
-              <a:rPr lang="en-US" dirty="0"/>
-              <a:t>Team profile for T5S. Emphasize the distinction between result and learning. Ask the team for one preserved decision and one corrective decision.</a:t>
-            </a:r>
             <a:endParaRPr lang="en-US" dirty="0"/>
           </a:p>
         </p:txBody>
@@ -1603,10 +1555,6 @@
           <a:bodyPr/>
           <a:lstStyle/>
           <a:p>
-            <a:fld id="{F7021451-1387-4CA6-816F-3879F97B5CBC}" type="slidenum">
-              <a:rPr lang="en-US"/>
-              <a:t>20</a:t>
-            </a:fld>
             <a:endParaRPr lang="en-US"/>
           </a:p>
         </p:txBody>
@@ -1652,6 +1600,10 @@
           </p:nvPr>
         </p:nvSpPr>
         <p:spPr/>
+        <p:txBody>
+          <a:bodyPr/>
+          <a:p/>
+        </p:txBody>
       </p:sp>
       <p:sp>
         <p:nvSpPr>
@@ -1668,10 +1620,6 @@
           <a:bodyPr/>
           <a:lstStyle/>
           <a:p>
-            <a:r>
-              <a:rPr lang="en-US" dirty="0"/>
-              <a:t>Team profile for SEBI's Watchlist. Emphasize the distinction between result and learning. Ask the team for one preserved decision and one corrective decision.</a:t>
-            </a:r>
             <a:endParaRPr lang="en-US" dirty="0"/>
           </a:p>
         </p:txBody>
@@ -1691,10 +1639,6 @@
           <a:bodyPr/>
           <a:lstStyle/>
           <a:p>
-            <a:fld id="{F7021451-1387-4CA6-816F-3879F97B5CBC}" type="slidenum">
-              <a:rPr lang="en-US"/>
-              <a:t>21</a:t>
-            </a:fld>
             <a:endParaRPr lang="en-US"/>
           </a:p>
         </p:txBody>
@@ -1740,6 +1684,10 @@
           </p:nvPr>
         </p:nvSpPr>
         <p:spPr/>
+        <p:txBody>
+          <a:bodyPr/>
+          <a:p/>
+        </p:txBody>
       </p:sp>
       <p:sp>
         <p:nvSpPr>
@@ -1756,10 +1704,6 @@
           <a:bodyPr/>
           <a:lstStyle/>
           <a:p>
-            <a:r>
-              <a:rPr lang="en-US" dirty="0"/>
-              <a:t>Use this synthesis to ask teams to describe what the market rewarded in their own result.</a:t>
-            </a:r>
             <a:endParaRPr lang="en-US" dirty="0"/>
           </a:p>
         </p:txBody>
@@ -1779,10 +1723,6 @@
           <a:bodyPr/>
           <a:lstStyle/>
           <a:p>
-            <a:fld id="{F7021451-1387-4CA6-816F-3879F97B5CBC}" type="slidenum">
-              <a:rPr lang="en-US"/>
-              <a:t>22</a:t>
-            </a:fld>
             <a:endParaRPr lang="en-US"/>
           </a:p>
         </p:txBody>
@@ -1828,6 +1768,10 @@
           </p:nvPr>
         </p:nvSpPr>
         <p:spPr/>
+        <p:txBody>
+          <a:bodyPr/>
+          <a:p/>
+        </p:txBody>
       </p:sp>
       <p:sp>
         <p:nvSpPr>
@@ -1844,10 +1788,6 @@
           <a:bodyPr/>
           <a:lstStyle/>
           <a:p>
-            <a:r>
-              <a:rPr lang="en-US" dirty="0"/>
-              <a:t>Do not humiliate underperforming teams. Frame punished outcomes as evidence for disciplined managerial correction.</a:t>
-            </a:r>
             <a:endParaRPr lang="en-US" dirty="0"/>
           </a:p>
         </p:txBody>
@@ -1867,10 +1807,6 @@
           <a:bodyPr/>
           <a:lstStyle/>
           <a:p>
-            <a:fld id="{F7021451-1387-4CA6-816F-3879F97B5CBC}" type="slidenum">
-              <a:rPr lang="en-US"/>
-              <a:t>23</a:t>
-            </a:fld>
             <a:endParaRPr lang="en-US"/>
           </a:p>
         </p:txBody>
@@ -1916,6 +1852,10 @@
           </p:nvPr>
         </p:nvSpPr>
         <p:spPr/>
+        <p:txBody>
+          <a:bodyPr/>
+          <a:p/>
+        </p:txBody>
       </p:sp>
       <p:sp>
         <p:nvSpPr>
@@ -1932,10 +1872,6 @@
           <a:bodyPr/>
           <a:lstStyle/>
           <a:p>
-            <a:r>
-              <a:rPr lang="en-US" dirty="0"/>
-              <a:t>End the debrief with commitments. Each team should write one rule before touching the next decision sheet.</a:t>
-            </a:r>
             <a:endParaRPr lang="en-US" dirty="0"/>
           </a:p>
         </p:txBody>
@@ -1955,10 +1891,6 @@
           <a:bodyPr/>
           <a:lstStyle/>
           <a:p>
-            <a:fld id="{F7021451-1387-4CA6-816F-3879F97B5CBC}" type="slidenum">
-              <a:rPr lang="en-US"/>
-              <a:t>24</a:t>
-            </a:fld>
             <a:endParaRPr lang="en-US"/>
           </a:p>
         </p:txBody>
@@ -2004,6 +1936,10 @@
           </p:nvPr>
         </p:nvSpPr>
         <p:spPr/>
+        <p:txBody>
+          <a:bodyPr/>
+          <a:p/>
+        </p:txBody>
       </p:sp>
       <p:sp>
         <p:nvSpPr>
@@ -2020,10 +1956,6 @@
           <a:bodyPr/>
           <a:lstStyle/>
           <a:p>
-            <a:r>
-              <a:rPr lang="en-US" dirty="0"/>
-              <a:t>Close by requiring each team to express learning as a decision rule. The point is responsible general management, not storytelling after the fact.</a:t>
-            </a:r>
             <a:endParaRPr lang="en-US" dirty="0"/>
           </a:p>
         </p:txBody>
@@ -2043,10 +1975,6 @@
           <a:bodyPr/>
           <a:lstStyle/>
           <a:p>
-            <a:fld id="{F7021451-1387-4CA6-816F-3879F97B5CBC}" type="slidenum">
-              <a:rPr lang="en-US"/>
-              <a:t>25</a:t>
-            </a:fld>
             <a:endParaRPr lang="en-US"/>
           </a:p>
         </p:txBody>
@@ -2092,6 +2020,10 @@
           </p:nvPr>
         </p:nvSpPr>
         <p:spPr/>
+        <p:txBody>
+          <a:bodyPr/>
+          <a:p/>
+        </p:txBody>
       </p:sp>
       <p:sp>
         <p:nvSpPr>
@@ -2108,10 +2040,6 @@
           <a:bodyPr/>
           <a:lstStyle/>
           <a:p>
-            <a:r>
-              <a:rPr lang="en-US" dirty="0"/>
-              <a:t>This is the aggregate dashboard. Use it to show that the universe-level numbers are only the beginning. The rest of the deck identifies which teams drove the movement.</a:t>
-            </a:r>
             <a:endParaRPr lang="en-US" dirty="0"/>
           </a:p>
         </p:txBody>
@@ -2131,10 +2059,6 @@
           <a:bodyPr/>
           <a:lstStyle/>
           <a:p>
-            <a:fld id="{F7021451-1387-4CA6-816F-3879F97B5CBC}" type="slidenum">
-              <a:rPr lang="en-US"/>
-              <a:t>3</a:t>
-            </a:fld>
             <a:endParaRPr lang="en-US"/>
           </a:p>
         </p:txBody>
@@ -2180,6 +2104,10 @@
           </p:nvPr>
         </p:nvSpPr>
         <p:spPr/>
+        <p:txBody>
+          <a:bodyPr/>
+          <a:p/>
+        </p:txBody>
       </p:sp>
       <p:sp>
         <p:nvSpPr>
@@ -2196,10 +2124,6 @@
           <a:bodyPr/>
           <a:lstStyle/>
           <a:p>
-            <a:r>
-              <a:rPr lang="en-US" dirty="0"/>
-              <a:t>Reveal the rank order but immediately move students away from celebration. Ask them to identify which non-TSR metric makes the leader credible or fragile.</a:t>
-            </a:r>
             <a:endParaRPr lang="en-US" dirty="0"/>
           </a:p>
         </p:txBody>
@@ -2219,10 +2143,6 @@
           <a:bodyPr/>
           <a:lstStyle/>
           <a:p>
-            <a:fld id="{F7021451-1387-4CA6-816F-3879F97B5CBC}" type="slidenum">
-              <a:rPr lang="en-US"/>
-              <a:t>4</a:t>
-            </a:fld>
             <a:endParaRPr lang="en-US"/>
           </a:p>
         </p:txBody>
@@ -2268,6 +2188,10 @@
           </p:nvPr>
         </p:nvSpPr>
         <p:spPr/>
+        <p:txBody>
+          <a:bodyPr/>
+          <a:p/>
+        </p:txBody>
       </p:sp>
       <p:sp>
         <p:nvSpPr>
@@ -2284,10 +2208,6 @@
           <a:bodyPr/>
           <a:lstStyle/>
           <a:p>
-            <a:r>
-              <a:rPr lang="en-US" dirty="0"/>
-              <a:t>This visual is designed for Socratic questioning. Ask each team whether the rank movement reflects an improved strategy system or merely a transient scoring effect.</a:t>
-            </a:r>
             <a:endParaRPr lang="en-US" dirty="0"/>
           </a:p>
         </p:txBody>
@@ -2307,10 +2227,6 @@
           <a:bodyPr/>
           <a:lstStyle/>
           <a:p>
-            <a:fld id="{F7021451-1387-4CA6-816F-3879F97B5CBC}" type="slidenum">
-              <a:rPr lang="en-US"/>
-              <a:t>5</a:t>
-            </a:fld>
             <a:endParaRPr lang="en-US"/>
           </a:p>
         </p:txBody>
@@ -2356,6 +2272,10 @@
           </p:nvPr>
         </p:nvSpPr>
         <p:spPr/>
+        <p:txBody>
+          <a:bodyPr/>
+          <a:p/>
+        </p:txBody>
       </p:sp>
       <p:sp>
         <p:nvSpPr>
@@ -2372,10 +2292,6 @@
           <a:bodyPr/>
           <a:lstStyle/>
           <a:p>
-            <a:r>
-              <a:rPr lang="en-US" dirty="0"/>
-              <a:t>The aim here is to block single-metric thinking. Have students nominate a winner under profit, share, valuation and capital productivity, then ask which is strategically coherent.</a:t>
-            </a:r>
             <a:endParaRPr lang="en-US" dirty="0"/>
           </a:p>
         </p:txBody>
@@ -2395,10 +2311,6 @@
           <a:bodyPr/>
           <a:lstStyle/>
           <a:p>
-            <a:fld id="{F7021451-1387-4CA6-816F-3879F97B5CBC}" type="slidenum">
-              <a:rPr lang="en-US"/>
-              <a:t>6</a:t>
-            </a:fld>
             <a:endParaRPr lang="en-US"/>
           </a:p>
         </p:txBody>
@@ -2444,6 +2356,10 @@
           </p:nvPr>
         </p:nvSpPr>
         <p:spPr/>
+        <p:txBody>
+          <a:bodyPr/>
+          <a:p/>
+        </p:txBody>
       </p:sp>
       <p:sp>
         <p:nvSpPr>
@@ -2460,10 +2376,6 @@
           <a:bodyPr/>
           <a:lstStyle/>
           <a:p>
-            <a:r>
-              <a:rPr lang="en-US" dirty="0"/>
-              <a:t>Ask each team to say whether its revenue movement came primarily from price, volume, product mix, technology mix or regional mix.</a:t>
-            </a:r>
             <a:endParaRPr lang="en-US" dirty="0"/>
           </a:p>
         </p:txBody>
@@ -2483,10 +2395,6 @@
           <a:bodyPr/>
           <a:lstStyle/>
           <a:p>
-            <a:fld id="{F7021451-1387-4CA6-816F-3879F97B5CBC}" type="slidenum">
-              <a:rPr lang="en-US"/>
-              <a:t>7</a:t>
-            </a:fld>
             <a:endParaRPr lang="en-US"/>
           </a:p>
         </p:txBody>
@@ -2532,6 +2440,10 @@
           </p:nvPr>
         </p:nvSpPr>
         <p:spPr/>
+        <p:txBody>
+          <a:bodyPr/>
+          <a:p/>
+        </p:txBody>
       </p:sp>
       <p:sp>
         <p:nvSpPr>
@@ -2548,10 +2460,6 @@
           <a:bodyPr/>
           <a:lstStyle/>
           <a:p>
-            <a:r>
-              <a:rPr lang="en-US" dirty="0"/>
-              <a:t>This slide should lead into cost structure. Ask teams to avoid “we grew” explanations and specify which cost or margin moved.</a:t>
-            </a:r>
             <a:endParaRPr lang="en-US" dirty="0"/>
           </a:p>
         </p:txBody>
@@ -2571,10 +2479,6 @@
           <a:bodyPr/>
           <a:lstStyle/>
           <a:p>
-            <a:fld id="{F7021451-1387-4CA6-816F-3879F97B5CBC}" type="slidenum">
-              <a:rPr lang="en-US"/>
-              <a:t>8</a:t>
-            </a:fld>
             <a:endParaRPr lang="en-US"/>
           </a:p>
         </p:txBody>
@@ -2620,6 +2524,10 @@
           </p:nvPr>
         </p:nvSpPr>
         <p:spPr/>
+        <p:txBody>
+          <a:bodyPr/>
+          <a:p/>
+        </p:txBody>
       </p:sp>
       <p:sp>
         <p:nvSpPr>
@@ -2636,10 +2544,6 @@
           <a:bodyPr/>
           <a:lstStyle/>
           <a:p>
-            <a:r>
-              <a:rPr lang="en-US" dirty="0"/>
-              <a:t>Use this slide to ask whether share gain came from a real value proposition or price/availability without economics.</a:t>
-            </a:r>
             <a:endParaRPr lang="en-US" dirty="0"/>
           </a:p>
         </p:txBody>
@@ -2659,10 +2563,6 @@
           <a:bodyPr/>
           <a:lstStyle/>
           <a:p>
-            <a:fld id="{F7021451-1387-4CA6-816F-3879F97B5CBC}" type="slidenum">
-              <a:rPr lang="en-US"/>
-              <a:t>9</a:t>
-            </a:fld>
             <a:endParaRPr lang="en-US"/>
           </a:p>
         </p:txBody>
@@ -3149,6 +3049,10 @@
             <a:prstDash val="solid"/>
           </a:ln>
         </p:spPr>
+        <p:txBody>
+          <a:bodyPr/>
+          <a:p/>
+        </p:txBody>
       </p:sp>
       <p:sp>
         <p:nvSpPr>
@@ -3467,6 +3371,10 @@
             <a:prstDash val="solid"/>
           </a:ln>
         </p:spPr>
+        <p:txBody>
+          <a:bodyPr/>
+          <a:p/>
+        </p:txBody>
       </p:sp>
       <p:sp>
         <p:nvSpPr>
@@ -3570,6 +3478,10 @@
             <a:prstDash val="solid"/>
           </a:ln>
         </p:spPr>
+        <p:txBody>
+          <a:bodyPr/>
+          <a:p/>
+        </p:txBody>
       </p:sp>
       <p:sp>
         <p:nvSpPr>
@@ -3636,6 +3548,10 @@
             <a:prstDash val="solid"/>
           </a:ln>
         </p:spPr>
+        <p:txBody>
+          <a:bodyPr/>
+          <a:p/>
+        </p:txBody>
       </p:sp>
       <p:sp>
         <p:nvSpPr>
@@ -3702,6 +3618,10 @@
             <a:prstDash val="solid"/>
           </a:ln>
         </p:spPr>
+        <p:txBody>
+          <a:bodyPr/>
+          <a:p/>
+        </p:txBody>
       </p:sp>
       <p:sp>
         <p:nvSpPr>
@@ -3768,6 +3688,10 @@
             <a:prstDash val="solid"/>
           </a:ln>
         </p:spPr>
+        <p:txBody>
+          <a:bodyPr/>
+          <a:p/>
+        </p:txBody>
       </p:sp>
       <p:sp>
         <p:nvSpPr>
@@ -3834,6 +3758,10 @@
             <a:prstDash val="solid"/>
           </a:ln>
         </p:spPr>
+        <p:txBody>
+          <a:bodyPr/>
+          <a:p/>
+        </p:txBody>
       </p:sp>
       <p:sp>
         <p:nvSpPr>
@@ -3900,6 +3828,10 @@
             <a:prstDash val="solid"/>
           </a:ln>
         </p:spPr>
+        <p:txBody>
+          <a:bodyPr/>
+          <a:p/>
+        </p:txBody>
       </p:sp>
       <p:sp>
         <p:nvSpPr>
@@ -3966,6 +3898,10 @@
             <a:prstDash val="solid"/>
           </a:ln>
         </p:spPr>
+        <p:txBody>
+          <a:bodyPr/>
+          <a:p/>
+        </p:txBody>
       </p:sp>
       <p:sp>
         <p:nvSpPr>
@@ -4032,6 +3968,10 @@
             <a:prstDash val="solid"/>
           </a:ln>
         </p:spPr>
+        <p:txBody>
+          <a:bodyPr/>
+          <a:p/>
+        </p:txBody>
       </p:sp>
       <p:sp>
         <p:nvSpPr>
@@ -4098,6 +4038,10 @@
             <a:prstDash val="solid"/>
           </a:ln>
         </p:spPr>
+        <p:txBody>
+          <a:bodyPr/>
+          <a:p/>
+        </p:txBody>
       </p:sp>
       <p:sp>
         <p:nvSpPr>
@@ -4164,6 +4108,10 @@
             <a:prstDash val="solid"/>
           </a:ln>
         </p:spPr>
+        <p:txBody>
+          <a:bodyPr/>
+          <a:p/>
+        </p:txBody>
       </p:sp>
       <p:sp>
         <p:nvSpPr>
@@ -4230,6 +4178,10 @@
             <a:prstDash val="solid"/>
           </a:ln>
         </p:spPr>
+        <p:txBody>
+          <a:bodyPr/>
+          <a:p/>
+        </p:txBody>
       </p:sp>
       <p:sp>
         <p:nvSpPr>
@@ -4296,6 +4248,10 @@
             <a:prstDash val="solid"/>
           </a:ln>
         </p:spPr>
+        <p:txBody>
+          <a:bodyPr/>
+          <a:p/>
+        </p:txBody>
       </p:sp>
       <p:sp>
         <p:nvSpPr>
@@ -4362,6 +4318,10 @@
             <a:prstDash val="solid"/>
           </a:ln>
         </p:spPr>
+        <p:txBody>
+          <a:bodyPr/>
+          <a:p/>
+        </p:txBody>
       </p:sp>
       <p:sp>
         <p:nvSpPr>
@@ -4428,6 +4388,10 @@
             <a:prstDash val="solid"/>
           </a:ln>
         </p:spPr>
+        <p:txBody>
+          <a:bodyPr/>
+          <a:p/>
+        </p:txBody>
       </p:sp>
       <p:sp>
         <p:nvSpPr>
@@ -4494,6 +4458,10 @@
             <a:prstDash val="solid"/>
           </a:ln>
         </p:spPr>
+        <p:txBody>
+          <a:bodyPr/>
+          <a:p/>
+        </p:txBody>
       </p:sp>
       <p:sp>
         <p:nvSpPr>
@@ -4560,6 +4528,10 @@
             <a:prstDash val="solid"/>
           </a:ln>
         </p:spPr>
+        <p:txBody>
+          <a:bodyPr/>
+          <a:p/>
+        </p:txBody>
       </p:sp>
       <p:sp>
         <p:nvSpPr>
@@ -4626,6 +4598,10 @@
             <a:prstDash val="solid"/>
           </a:ln>
         </p:spPr>
+        <p:txBody>
+          <a:bodyPr/>
+          <a:p/>
+        </p:txBody>
       </p:sp>
       <p:sp>
         <p:nvSpPr>
@@ -4692,6 +4668,10 @@
             <a:prstDash val="solid"/>
           </a:ln>
         </p:spPr>
+        <p:txBody>
+          <a:bodyPr/>
+          <a:p/>
+        </p:txBody>
       </p:sp>
       <p:sp>
         <p:nvSpPr>
@@ -4758,6 +4738,10 @@
             <a:prstDash val="solid"/>
           </a:ln>
         </p:spPr>
+        <p:txBody>
+          <a:bodyPr/>
+          <a:p/>
+        </p:txBody>
       </p:sp>
       <p:sp>
         <p:nvSpPr>
@@ -4824,6 +4808,10 @@
             <a:prstDash val="solid"/>
           </a:ln>
         </p:spPr>
+        <p:txBody>
+          <a:bodyPr/>
+          <a:p/>
+        </p:txBody>
       </p:sp>
       <p:sp>
         <p:nvSpPr>
@@ -4890,6 +4878,10 @@
             <a:prstDash val="solid"/>
           </a:ln>
         </p:spPr>
+        <p:txBody>
+          <a:bodyPr/>
+          <a:p/>
+        </p:txBody>
       </p:sp>
       <p:sp>
         <p:nvSpPr>
@@ -4956,6 +4948,10 @@
             <a:prstDash val="solid"/>
           </a:ln>
         </p:spPr>
+        <p:txBody>
+          <a:bodyPr/>
+          <a:p/>
+        </p:txBody>
       </p:sp>
       <p:sp>
         <p:nvSpPr>
@@ -5022,6 +5018,10 @@
             <a:prstDash val="solid"/>
           </a:ln>
         </p:spPr>
+        <p:txBody>
+          <a:bodyPr/>
+          <a:p/>
+        </p:txBody>
       </p:sp>
       <p:sp>
         <p:nvSpPr>
@@ -5088,6 +5088,10 @@
             <a:prstDash val="solid"/>
           </a:ln>
         </p:spPr>
+        <p:txBody>
+          <a:bodyPr/>
+          <a:p/>
+        </p:txBody>
       </p:sp>
       <p:sp>
         <p:nvSpPr>
@@ -5154,6 +5158,10 @@
             <a:prstDash val="solid"/>
           </a:ln>
         </p:spPr>
+        <p:txBody>
+          <a:bodyPr/>
+          <a:p/>
+        </p:txBody>
       </p:sp>
       <p:sp>
         <p:nvSpPr>
@@ -5220,6 +5228,10 @@
             <a:prstDash val="solid"/>
           </a:ln>
         </p:spPr>
+        <p:txBody>
+          <a:bodyPr/>
+          <a:p/>
+        </p:txBody>
       </p:sp>
       <p:sp>
         <p:nvSpPr>
@@ -5286,6 +5298,10 @@
             <a:prstDash val="solid"/>
           </a:ln>
         </p:spPr>
+        <p:txBody>
+          <a:bodyPr/>
+          <a:p/>
+        </p:txBody>
       </p:sp>
       <p:sp>
         <p:nvSpPr>
@@ -5352,6 +5368,10 @@
             <a:prstDash val="solid"/>
           </a:ln>
         </p:spPr>
+        <p:txBody>
+          <a:bodyPr/>
+          <a:p/>
+        </p:txBody>
       </p:sp>
       <p:sp>
         <p:nvSpPr>
@@ -5588,6 +5608,10 @@
             <a:prstDash val="solid"/>
           </a:ln>
         </p:spPr>
+        <p:txBody>
+          <a:bodyPr/>
+          <a:p/>
+        </p:txBody>
       </p:sp>
       <p:sp>
         <p:nvSpPr>
@@ -5840,6 +5864,10 @@
             <a:prstDash val="solid"/>
           </a:ln>
         </p:spPr>
+        <p:txBody>
+          <a:bodyPr/>
+          <a:p/>
+        </p:txBody>
       </p:sp>
       <p:sp>
         <p:nvSpPr>
@@ -5984,6 +6012,10 @@
             <a:prstDash val="solid"/>
           </a:ln>
         </p:spPr>
+        <p:txBody>
+          <a:bodyPr/>
+          <a:p/>
+        </p:txBody>
       </p:sp>
       <p:sp>
         <p:nvSpPr>
@@ -6089,6 +6121,10 @@
             <a:prstDash val="solid"/>
           </a:ln>
         </p:spPr>
+        <p:txBody>
+          <a:bodyPr/>
+          <a:p/>
+        </p:txBody>
       </p:sp>
       <p:sp>
         <p:nvSpPr>
@@ -6194,6 +6230,10 @@
             <a:prstDash val="solid"/>
           </a:ln>
         </p:spPr>
+        <p:txBody>
+          <a:bodyPr/>
+          <a:p/>
+        </p:txBody>
       </p:sp>
       <p:sp>
         <p:nvSpPr>
@@ -6299,6 +6339,10 @@
             <a:prstDash val="solid"/>
           </a:ln>
         </p:spPr>
+        <p:txBody>
+          <a:bodyPr/>
+          <a:p/>
+        </p:txBody>
       </p:sp>
       <p:sp>
         <p:nvSpPr>
@@ -6404,6 +6448,10 @@
             <a:prstDash val="solid"/>
           </a:ln>
         </p:spPr>
+        <p:txBody>
+          <a:bodyPr/>
+          <a:p/>
+        </p:txBody>
       </p:sp>
       <p:sp>
         <p:nvSpPr>
@@ -6509,6 +6557,10 @@
             <a:prstDash val="solid"/>
           </a:ln>
         </p:spPr>
+        <p:txBody>
+          <a:bodyPr/>
+          <a:p/>
+        </p:txBody>
       </p:sp>
       <p:sp>
         <p:nvSpPr>
@@ -6573,6 +6625,10 @@
             <a:prstDash val="solid"/>
           </a:ln>
         </p:spPr>
+        <p:txBody>
+          <a:bodyPr/>
+          <a:p/>
+        </p:txBody>
       </p:sp>
       <p:sp>
         <p:nvSpPr>
@@ -6670,6 +6726,10 @@
             <a:prstDash val="solid"/>
           </a:ln>
         </p:spPr>
+        <p:txBody>
+          <a:bodyPr/>
+          <a:p/>
+        </p:txBody>
       </p:sp>
       <p:sp>
         <p:nvSpPr>
@@ -6733,6 +6793,10 @@
             <a:prstDash val="solid"/>
           </a:ln>
         </p:spPr>
+        <p:txBody>
+          <a:bodyPr/>
+          <a:p/>
+        </p:txBody>
       </p:sp>
       <p:sp>
         <p:nvSpPr>
@@ -6796,6 +6860,10 @@
             <a:prstDash val="solid"/>
           </a:ln>
         </p:spPr>
+        <p:txBody>
+          <a:bodyPr/>
+          <a:p/>
+        </p:txBody>
       </p:sp>
       <p:sp>
         <p:nvSpPr>
@@ -6859,6 +6927,10 @@
             <a:prstDash val="solid"/>
           </a:ln>
         </p:spPr>
+        <p:txBody>
+          <a:bodyPr/>
+          <a:p/>
+        </p:txBody>
       </p:sp>
       <p:sp>
         <p:nvSpPr>
@@ -6922,6 +6994,10 @@
             <a:prstDash val="solid"/>
           </a:ln>
         </p:spPr>
+        <p:txBody>
+          <a:bodyPr/>
+          <a:p/>
+        </p:txBody>
       </p:sp>
       <p:sp>
         <p:nvSpPr>
@@ -6985,6 +7061,10 @@
             <a:prstDash val="solid"/>
           </a:ln>
         </p:spPr>
+        <p:txBody>
+          <a:bodyPr/>
+          <a:p/>
+        </p:txBody>
       </p:sp>
       <p:sp>
         <p:nvSpPr>
@@ -7203,6 +7283,10 @@
             <a:prstDash val="solid"/>
           </a:ln>
         </p:spPr>
+        <p:txBody>
+          <a:bodyPr/>
+          <a:p/>
+        </p:txBody>
       </p:sp>
       <p:sp>
         <p:nvSpPr>
@@ -7455,6 +7539,10 @@
             <a:prstDash val="solid"/>
           </a:ln>
         </p:spPr>
+        <p:txBody>
+          <a:bodyPr/>
+          <a:p/>
+        </p:txBody>
       </p:sp>
       <p:sp>
         <p:nvSpPr>
@@ -7558,6 +7646,10 @@
             <a:prstDash val="solid"/>
           </a:ln>
         </p:spPr>
+        <p:txBody>
+          <a:bodyPr/>
+          <a:p/>
+        </p:txBody>
       </p:sp>
       <p:sp>
         <p:nvSpPr>
@@ -7624,6 +7716,10 @@
             <a:prstDash val="solid"/>
           </a:ln>
         </p:spPr>
+        <p:txBody>
+          <a:bodyPr/>
+          <a:p/>
+        </p:txBody>
       </p:sp>
       <p:sp>
         <p:nvSpPr>
@@ -7690,6 +7786,10 @@
             <a:prstDash val="solid"/>
           </a:ln>
         </p:spPr>
+        <p:txBody>
+          <a:bodyPr/>
+          <a:p/>
+        </p:txBody>
       </p:sp>
       <p:sp>
         <p:nvSpPr>
@@ -7756,6 +7856,10 @@
             <a:prstDash val="solid"/>
           </a:ln>
         </p:spPr>
+        <p:txBody>
+          <a:bodyPr/>
+          <a:p/>
+        </p:txBody>
       </p:sp>
       <p:sp>
         <p:nvSpPr>
@@ -7822,6 +7926,10 @@
             <a:prstDash val="solid"/>
           </a:ln>
         </p:spPr>
+        <p:txBody>
+          <a:bodyPr/>
+          <a:p/>
+        </p:txBody>
       </p:sp>
       <p:sp>
         <p:nvSpPr>
@@ -7888,6 +7996,10 @@
             <a:prstDash val="solid"/>
           </a:ln>
         </p:spPr>
+        <p:txBody>
+          <a:bodyPr/>
+          <a:p/>
+        </p:txBody>
       </p:sp>
       <p:sp>
         <p:nvSpPr>
@@ -7954,6 +8066,10 @@
             <a:prstDash val="solid"/>
           </a:ln>
         </p:spPr>
+        <p:txBody>
+          <a:bodyPr/>
+          <a:p/>
+        </p:txBody>
       </p:sp>
       <p:sp>
         <p:nvSpPr>
@@ -8020,6 +8136,10 @@
             <a:prstDash val="solid"/>
           </a:ln>
         </p:spPr>
+        <p:txBody>
+          <a:bodyPr/>
+          <a:p/>
+        </p:txBody>
       </p:sp>
       <p:sp>
         <p:nvSpPr>
@@ -8086,6 +8206,10 @@
             <a:prstDash val="solid"/>
           </a:ln>
         </p:spPr>
+        <p:txBody>
+          <a:bodyPr/>
+          <a:p/>
+        </p:txBody>
       </p:sp>
       <p:sp>
         <p:nvSpPr>
@@ -8152,6 +8276,10 @@
             <a:prstDash val="solid"/>
           </a:ln>
         </p:spPr>
+        <p:txBody>
+          <a:bodyPr/>
+          <a:p/>
+        </p:txBody>
       </p:sp>
       <p:sp>
         <p:nvSpPr>
@@ -8218,6 +8346,10 @@
             <a:prstDash val="solid"/>
           </a:ln>
         </p:spPr>
+        <p:txBody>
+          <a:bodyPr/>
+          <a:p/>
+        </p:txBody>
       </p:sp>
       <p:sp>
         <p:nvSpPr>
@@ -8284,6 +8416,10 @@
             <a:prstDash val="solid"/>
           </a:ln>
         </p:spPr>
+        <p:txBody>
+          <a:bodyPr/>
+          <a:p/>
+        </p:txBody>
       </p:sp>
       <p:sp>
         <p:nvSpPr>
@@ -8350,6 +8486,10 @@
             <a:prstDash val="solid"/>
           </a:ln>
         </p:spPr>
+        <p:txBody>
+          <a:bodyPr/>
+          <a:p/>
+        </p:txBody>
       </p:sp>
       <p:sp>
         <p:nvSpPr>
@@ -8416,6 +8556,10 @@
             <a:prstDash val="solid"/>
           </a:ln>
         </p:spPr>
+        <p:txBody>
+          <a:bodyPr/>
+          <a:p/>
+        </p:txBody>
       </p:sp>
       <p:sp>
         <p:nvSpPr>
@@ -8482,6 +8626,10 @@
             <a:prstDash val="solid"/>
           </a:ln>
         </p:spPr>
+        <p:txBody>
+          <a:bodyPr/>
+          <a:p/>
+        </p:txBody>
       </p:sp>
       <p:sp>
         <p:nvSpPr>
@@ -8548,6 +8696,10 @@
             <a:prstDash val="solid"/>
           </a:ln>
         </p:spPr>
+        <p:txBody>
+          <a:bodyPr/>
+          <a:p/>
+        </p:txBody>
       </p:sp>
       <p:sp>
         <p:nvSpPr>
@@ -8614,6 +8766,10 @@
             <a:prstDash val="solid"/>
           </a:ln>
         </p:spPr>
+        <p:txBody>
+          <a:bodyPr/>
+          <a:p/>
+        </p:txBody>
       </p:sp>
       <p:sp>
         <p:nvSpPr>
@@ -8680,6 +8836,10 @@
             <a:prstDash val="solid"/>
           </a:ln>
         </p:spPr>
+        <p:txBody>
+          <a:bodyPr/>
+          <a:p/>
+        </p:txBody>
       </p:sp>
       <p:sp>
         <p:nvSpPr>
@@ -8746,6 +8906,10 @@
             <a:prstDash val="solid"/>
           </a:ln>
         </p:spPr>
+        <p:txBody>
+          <a:bodyPr/>
+          <a:p/>
+        </p:txBody>
       </p:sp>
       <p:sp>
         <p:nvSpPr>
@@ -8812,6 +8976,10 @@
             <a:prstDash val="solid"/>
           </a:ln>
         </p:spPr>
+        <p:txBody>
+          <a:bodyPr/>
+          <a:p/>
+        </p:txBody>
       </p:sp>
       <p:sp>
         <p:nvSpPr>
@@ -8878,6 +9046,10 @@
             <a:prstDash val="solid"/>
           </a:ln>
         </p:spPr>
+        <p:txBody>
+          <a:bodyPr/>
+          <a:p/>
+        </p:txBody>
       </p:sp>
       <p:sp>
         <p:nvSpPr>
@@ -8944,6 +9116,10 @@
             <a:prstDash val="solid"/>
           </a:ln>
         </p:spPr>
+        <p:txBody>
+          <a:bodyPr/>
+          <a:p/>
+        </p:txBody>
       </p:sp>
       <p:sp>
         <p:nvSpPr>
@@ -9010,6 +9186,10 @@
             <a:prstDash val="solid"/>
           </a:ln>
         </p:spPr>
+        <p:txBody>
+          <a:bodyPr/>
+          <a:p/>
+        </p:txBody>
       </p:sp>
       <p:sp>
         <p:nvSpPr>
@@ -9076,6 +9256,10 @@
             <a:prstDash val="solid"/>
           </a:ln>
         </p:spPr>
+        <p:txBody>
+          <a:bodyPr/>
+          <a:p/>
+        </p:txBody>
       </p:sp>
       <p:sp>
         <p:nvSpPr>
@@ -9142,6 +9326,10 @@
             <a:prstDash val="solid"/>
           </a:ln>
         </p:spPr>
+        <p:txBody>
+          <a:bodyPr/>
+          <a:p/>
+        </p:txBody>
       </p:sp>
       <p:sp>
         <p:nvSpPr>
@@ -9208,6 +9396,10 @@
             <a:prstDash val="solid"/>
           </a:ln>
         </p:spPr>
+        <p:txBody>
+          <a:bodyPr/>
+          <a:p/>
+        </p:txBody>
       </p:sp>
       <p:sp>
         <p:nvSpPr>
@@ -9274,6 +9466,10 @@
             <a:prstDash val="solid"/>
           </a:ln>
         </p:spPr>
+        <p:txBody>
+          <a:bodyPr/>
+          <a:p/>
+        </p:txBody>
       </p:sp>
       <p:sp>
         <p:nvSpPr>
@@ -9340,6 +9536,10 @@
             <a:prstDash val="solid"/>
           </a:ln>
         </p:spPr>
+        <p:txBody>
+          <a:bodyPr/>
+          <a:p/>
+        </p:txBody>
       </p:sp>
       <p:sp>
         <p:nvSpPr>
@@ -9406,6 +9606,10 @@
             <a:prstDash val="solid"/>
           </a:ln>
         </p:spPr>
+        <p:txBody>
+          <a:bodyPr/>
+          <a:p/>
+        </p:txBody>
       </p:sp>
       <p:sp>
         <p:nvSpPr>
@@ -9472,6 +9676,10 @@
             <a:prstDash val="solid"/>
           </a:ln>
         </p:spPr>
+        <p:txBody>
+          <a:bodyPr/>
+          <a:p/>
+        </p:txBody>
       </p:sp>
       <p:sp>
         <p:nvSpPr>
@@ -9538,6 +9746,10 @@
             <a:prstDash val="solid"/>
           </a:ln>
         </p:spPr>
+        <p:txBody>
+          <a:bodyPr/>
+          <a:p/>
+        </p:txBody>
       </p:sp>
       <p:sp>
         <p:nvSpPr>
@@ -9604,6 +9816,10 @@
             <a:prstDash val="solid"/>
           </a:ln>
         </p:spPr>
+        <p:txBody>
+          <a:bodyPr/>
+          <a:p/>
+        </p:txBody>
       </p:sp>
       <p:sp>
         <p:nvSpPr>
@@ -9670,6 +9886,10 @@
             <a:prstDash val="solid"/>
           </a:ln>
         </p:spPr>
+        <p:txBody>
+          <a:bodyPr/>
+          <a:p/>
+        </p:txBody>
       </p:sp>
       <p:sp>
         <p:nvSpPr>
@@ -9736,6 +9956,10 @@
             <a:prstDash val="solid"/>
           </a:ln>
         </p:spPr>
+        <p:txBody>
+          <a:bodyPr/>
+          <a:p/>
+        </p:txBody>
       </p:sp>
       <p:sp>
         <p:nvSpPr>
@@ -9802,6 +10026,10 @@
             <a:prstDash val="solid"/>
           </a:ln>
         </p:spPr>
+        <p:txBody>
+          <a:bodyPr/>
+          <a:p/>
+        </p:txBody>
       </p:sp>
       <p:sp>
         <p:nvSpPr>
@@ -10023,6 +10251,10 @@
             <a:prstDash val="solid"/>
           </a:ln>
         </p:spPr>
+        <p:txBody>
+          <a:bodyPr/>
+          <a:p/>
+        </p:txBody>
       </p:sp>
       <p:sp>
         <p:nvSpPr>
@@ -10275,6 +10507,10 @@
             <a:prstDash val="solid"/>
           </a:ln>
         </p:spPr>
+        <p:txBody>
+          <a:bodyPr/>
+          <a:p/>
+        </p:txBody>
       </p:sp>
       <p:sp>
         <p:nvSpPr>
@@ -10419,6 +10655,10 @@
             <a:prstDash val="solid"/>
           </a:ln>
         </p:spPr>
+        <p:txBody>
+          <a:bodyPr/>
+          <a:p/>
+        </p:txBody>
       </p:sp>
       <p:sp>
         <p:nvSpPr>
@@ -10524,6 +10764,10 @@
             <a:prstDash val="solid"/>
           </a:ln>
         </p:spPr>
+        <p:txBody>
+          <a:bodyPr/>
+          <a:p/>
+        </p:txBody>
       </p:sp>
       <p:sp>
         <p:nvSpPr>
@@ -10629,6 +10873,10 @@
             <a:prstDash val="solid"/>
           </a:ln>
         </p:spPr>
+        <p:txBody>
+          <a:bodyPr/>
+          <a:p/>
+        </p:txBody>
       </p:sp>
       <p:sp>
         <p:nvSpPr>
@@ -10734,6 +10982,10 @@
             <a:prstDash val="solid"/>
           </a:ln>
         </p:spPr>
+        <p:txBody>
+          <a:bodyPr/>
+          <a:p/>
+        </p:txBody>
       </p:sp>
       <p:sp>
         <p:nvSpPr>
@@ -10839,6 +11091,10 @@
             <a:prstDash val="solid"/>
           </a:ln>
         </p:spPr>
+        <p:txBody>
+          <a:bodyPr/>
+          <a:p/>
+        </p:txBody>
       </p:sp>
       <p:sp>
         <p:nvSpPr>
@@ -10944,6 +11200,10 @@
             <a:prstDash val="solid"/>
           </a:ln>
         </p:spPr>
+        <p:txBody>
+          <a:bodyPr/>
+          <a:p/>
+        </p:txBody>
       </p:sp>
       <p:sp>
         <p:nvSpPr>
@@ -11049,6 +11309,10 @@
             <a:prstDash val="solid"/>
           </a:ln>
         </p:spPr>
+        <p:txBody>
+          <a:bodyPr/>
+          <a:p/>
+        </p:txBody>
       </p:sp>
       <p:sp>
         <p:nvSpPr>
@@ -11154,6 +11418,10 @@
             <a:prstDash val="solid"/>
           </a:ln>
         </p:spPr>
+        <p:txBody>
+          <a:bodyPr/>
+          <a:p/>
+        </p:txBody>
       </p:sp>
       <p:sp>
         <p:nvSpPr>
@@ -11259,6 +11527,10 @@
             <a:prstDash val="solid"/>
           </a:ln>
         </p:spPr>
+        <p:txBody>
+          <a:bodyPr/>
+          <a:p/>
+        </p:txBody>
       </p:sp>
       <p:sp>
         <p:nvSpPr>
@@ -11364,6 +11636,10 @@
             <a:prstDash val="solid"/>
           </a:ln>
         </p:spPr>
+        <p:txBody>
+          <a:bodyPr/>
+          <a:p/>
+        </p:txBody>
       </p:sp>
       <p:sp>
         <p:nvSpPr>
@@ -11469,6 +11745,10 @@
             <a:prstDash val="solid"/>
           </a:ln>
         </p:spPr>
+        <p:txBody>
+          <a:bodyPr/>
+          <a:p/>
+        </p:txBody>
       </p:sp>
       <p:sp>
         <p:nvSpPr>
@@ -11574,6 +11854,10 @@
             <a:prstDash val="solid"/>
           </a:ln>
         </p:spPr>
+        <p:txBody>
+          <a:bodyPr/>
+          <a:p/>
+        </p:txBody>
       </p:sp>
       <p:sp>
         <p:nvSpPr>
@@ -11636,6 +11920,10 @@
             <a:prstDash val="solid"/>
           </a:ln>
         </p:spPr>
+        <p:txBody>
+          <a:bodyPr/>
+          <a:p/>
+        </p:txBody>
       </p:sp>
       <p:sp>
         <p:nvSpPr>
@@ -11816,6 +12104,10 @@
             <a:prstDash val="solid"/>
           </a:ln>
         </p:spPr>
+        <p:txBody>
+          <a:bodyPr/>
+          <a:p/>
+        </p:txBody>
       </p:sp>
       <p:sp>
         <p:nvSpPr>
@@ -12068,6 +12360,10 @@
             <a:prstDash val="solid"/>
           </a:ln>
         </p:spPr>
+        <p:txBody>
+          <a:bodyPr/>
+          <a:p/>
+        </p:txBody>
       </p:sp>
       <p:sp>
         <p:nvSpPr>
@@ -12171,6 +12467,10 @@
             <a:prstDash val="solid"/>
           </a:ln>
         </p:spPr>
+        <p:txBody>
+          <a:bodyPr/>
+          <a:p/>
+        </p:txBody>
       </p:sp>
       <p:sp>
         <p:nvSpPr>
@@ -12237,6 +12537,10 @@
             <a:prstDash val="solid"/>
           </a:ln>
         </p:spPr>
+        <p:txBody>
+          <a:bodyPr/>
+          <a:p/>
+        </p:txBody>
       </p:sp>
       <p:sp>
         <p:nvSpPr>
@@ -12303,6 +12607,10 @@
             <a:prstDash val="solid"/>
           </a:ln>
         </p:spPr>
+        <p:txBody>
+          <a:bodyPr/>
+          <a:p/>
+        </p:txBody>
       </p:sp>
       <p:sp>
         <p:nvSpPr>
@@ -12369,6 +12677,10 @@
             <a:prstDash val="solid"/>
           </a:ln>
         </p:spPr>
+        <p:txBody>
+          <a:bodyPr/>
+          <a:p/>
+        </p:txBody>
       </p:sp>
       <p:sp>
         <p:nvSpPr>
@@ -12435,6 +12747,10 @@
             <a:prstDash val="solid"/>
           </a:ln>
         </p:spPr>
+        <p:txBody>
+          <a:bodyPr/>
+          <a:p/>
+        </p:txBody>
       </p:sp>
       <p:sp>
         <p:nvSpPr>
@@ -12501,6 +12817,10 @@
             <a:prstDash val="solid"/>
           </a:ln>
         </p:spPr>
+        <p:txBody>
+          <a:bodyPr/>
+          <a:p/>
+        </p:txBody>
       </p:sp>
       <p:sp>
         <p:nvSpPr>
@@ -12567,6 +12887,10 @@
             <a:prstDash val="solid"/>
           </a:ln>
         </p:spPr>
+        <p:txBody>
+          <a:bodyPr/>
+          <a:p/>
+        </p:txBody>
       </p:sp>
       <p:sp>
         <p:nvSpPr>
@@ -12633,6 +12957,10 @@
             <a:prstDash val="solid"/>
           </a:ln>
         </p:spPr>
+        <p:txBody>
+          <a:bodyPr/>
+          <a:p/>
+        </p:txBody>
       </p:sp>
       <p:sp>
         <p:nvSpPr>
@@ -12699,6 +13027,10 @@
             <a:prstDash val="solid"/>
           </a:ln>
         </p:spPr>
+        <p:txBody>
+          <a:bodyPr/>
+          <a:p/>
+        </p:txBody>
       </p:sp>
       <p:sp>
         <p:nvSpPr>
@@ -12765,6 +13097,10 @@
             <a:prstDash val="solid"/>
           </a:ln>
         </p:spPr>
+        <p:txBody>
+          <a:bodyPr/>
+          <a:p/>
+        </p:txBody>
       </p:sp>
       <p:sp>
         <p:nvSpPr>
@@ -12831,6 +13167,10 @@
             <a:prstDash val="solid"/>
           </a:ln>
         </p:spPr>
+        <p:txBody>
+          <a:bodyPr/>
+          <a:p/>
+        </p:txBody>
       </p:sp>
       <p:sp>
         <p:nvSpPr>
@@ -12897,6 +13237,10 @@
             <a:prstDash val="solid"/>
           </a:ln>
         </p:spPr>
+        <p:txBody>
+          <a:bodyPr/>
+          <a:p/>
+        </p:txBody>
       </p:sp>
       <p:sp>
         <p:nvSpPr>
@@ -12963,6 +13307,10 @@
             <a:prstDash val="solid"/>
           </a:ln>
         </p:spPr>
+        <p:txBody>
+          <a:bodyPr/>
+          <a:p/>
+        </p:txBody>
       </p:sp>
       <p:sp>
         <p:nvSpPr>
@@ -13029,6 +13377,10 @@
             <a:prstDash val="solid"/>
           </a:ln>
         </p:spPr>
+        <p:txBody>
+          <a:bodyPr/>
+          <a:p/>
+        </p:txBody>
       </p:sp>
       <p:sp>
         <p:nvSpPr>
@@ -13095,6 +13447,10 @@
             <a:prstDash val="solid"/>
           </a:ln>
         </p:spPr>
+        <p:txBody>
+          <a:bodyPr/>
+          <a:p/>
+        </p:txBody>
       </p:sp>
       <p:sp>
         <p:nvSpPr>
@@ -13161,6 +13517,10 @@
             <a:prstDash val="solid"/>
           </a:ln>
         </p:spPr>
+        <p:txBody>
+          <a:bodyPr/>
+          <a:p/>
+        </p:txBody>
       </p:sp>
       <p:sp>
         <p:nvSpPr>
@@ -13227,6 +13587,10 @@
             <a:prstDash val="solid"/>
           </a:ln>
         </p:spPr>
+        <p:txBody>
+          <a:bodyPr/>
+          <a:p/>
+        </p:txBody>
       </p:sp>
       <p:sp>
         <p:nvSpPr>
@@ -13293,6 +13657,10 @@
             <a:prstDash val="solid"/>
           </a:ln>
         </p:spPr>
+        <p:txBody>
+          <a:bodyPr/>
+          <a:p/>
+        </p:txBody>
       </p:sp>
       <p:sp>
         <p:nvSpPr>
@@ -13359,6 +13727,10 @@
             <a:prstDash val="solid"/>
           </a:ln>
         </p:spPr>
+        <p:txBody>
+          <a:bodyPr/>
+          <a:p/>
+        </p:txBody>
       </p:sp>
       <p:sp>
         <p:nvSpPr>
@@ -13425,6 +13797,10 @@
             <a:prstDash val="solid"/>
           </a:ln>
         </p:spPr>
+        <p:txBody>
+          <a:bodyPr/>
+          <a:p/>
+        </p:txBody>
       </p:sp>
       <p:sp>
         <p:nvSpPr>
@@ -13491,6 +13867,10 @@
             <a:prstDash val="solid"/>
           </a:ln>
         </p:spPr>
+        <p:txBody>
+          <a:bodyPr/>
+          <a:p/>
+        </p:txBody>
       </p:sp>
       <p:sp>
         <p:nvSpPr>
@@ -13557,6 +13937,10 @@
             <a:prstDash val="solid"/>
           </a:ln>
         </p:spPr>
+        <p:txBody>
+          <a:bodyPr/>
+          <a:p/>
+        </p:txBody>
       </p:sp>
       <p:sp>
         <p:nvSpPr>
@@ -13623,6 +14007,10 @@
             <a:prstDash val="solid"/>
           </a:ln>
         </p:spPr>
+        <p:txBody>
+          <a:bodyPr/>
+          <a:p/>
+        </p:txBody>
       </p:sp>
       <p:sp>
         <p:nvSpPr>
@@ -13689,6 +14077,10 @@
             <a:prstDash val="solid"/>
           </a:ln>
         </p:spPr>
+        <p:txBody>
+          <a:bodyPr/>
+          <a:p/>
+        </p:txBody>
       </p:sp>
       <p:sp>
         <p:nvSpPr>
@@ -13755,6 +14147,10 @@
             <a:prstDash val="solid"/>
           </a:ln>
         </p:spPr>
+        <p:txBody>
+          <a:bodyPr/>
+          <a:p/>
+        </p:txBody>
       </p:sp>
       <p:sp>
         <p:nvSpPr>
@@ -13821,6 +14217,10 @@
             <a:prstDash val="solid"/>
           </a:ln>
         </p:spPr>
+        <p:txBody>
+          <a:bodyPr/>
+          <a:p/>
+        </p:txBody>
       </p:sp>
       <p:sp>
         <p:nvSpPr>
@@ -13887,6 +14287,10 @@
             <a:prstDash val="solid"/>
           </a:ln>
         </p:spPr>
+        <p:txBody>
+          <a:bodyPr/>
+          <a:p/>
+        </p:txBody>
       </p:sp>
       <p:sp>
         <p:nvSpPr>
@@ -13953,6 +14357,10 @@
             <a:prstDash val="solid"/>
           </a:ln>
         </p:spPr>
+        <p:txBody>
+          <a:bodyPr/>
+          <a:p/>
+        </p:txBody>
       </p:sp>
       <p:sp>
         <p:nvSpPr>
@@ -14019,6 +14427,10 @@
             <a:prstDash val="solid"/>
           </a:ln>
         </p:spPr>
+        <p:txBody>
+          <a:bodyPr/>
+          <a:p/>
+        </p:txBody>
       </p:sp>
       <p:sp>
         <p:nvSpPr>
@@ -14085,6 +14497,10 @@
             <a:prstDash val="solid"/>
           </a:ln>
         </p:spPr>
+        <p:txBody>
+          <a:bodyPr/>
+          <a:p/>
+        </p:txBody>
       </p:sp>
       <p:sp>
         <p:nvSpPr>
@@ -14151,6 +14567,10 @@
             <a:prstDash val="solid"/>
           </a:ln>
         </p:spPr>
+        <p:txBody>
+          <a:bodyPr/>
+          <a:p/>
+        </p:txBody>
       </p:sp>
       <p:sp>
         <p:nvSpPr>
@@ -14217,6 +14637,10 @@
             <a:prstDash val="solid"/>
           </a:ln>
         </p:spPr>
+        <p:txBody>
+          <a:bodyPr/>
+          <a:p/>
+        </p:txBody>
       </p:sp>
       <p:sp>
         <p:nvSpPr>
@@ -14283,6 +14707,10 @@
             <a:prstDash val="solid"/>
           </a:ln>
         </p:spPr>
+        <p:txBody>
+          <a:bodyPr/>
+          <a:p/>
+        </p:txBody>
       </p:sp>
       <p:sp>
         <p:nvSpPr>
@@ -14349,6 +14777,10 @@
             <a:prstDash val="solid"/>
           </a:ln>
         </p:spPr>
+        <p:txBody>
+          <a:bodyPr/>
+          <a:p/>
+        </p:txBody>
       </p:sp>
       <p:sp>
         <p:nvSpPr>
@@ -14415,6 +14847,10 @@
             <a:prstDash val="solid"/>
           </a:ln>
         </p:spPr>
+        <p:txBody>
+          <a:bodyPr/>
+          <a:p/>
+        </p:txBody>
       </p:sp>
       <p:sp>
         <p:nvSpPr>
@@ -14636,6 +15072,10 @@
             <a:prstDash val="solid"/>
           </a:ln>
         </p:spPr>
+        <p:txBody>
+          <a:bodyPr/>
+          <a:p/>
+        </p:txBody>
       </p:sp>
       <p:sp>
         <p:nvSpPr>
@@ -14888,6 +15328,10 @@
             <a:prstDash val="solid"/>
           </a:ln>
         </p:spPr>
+        <p:txBody>
+          <a:bodyPr/>
+          <a:p/>
+        </p:txBody>
       </p:sp>
       <p:sp>
         <p:nvSpPr>
@@ -14991,6 +15435,10 @@
             <a:prstDash val="solid"/>
           </a:ln>
         </p:spPr>
+        <p:txBody>
+          <a:bodyPr/>
+          <a:p/>
+        </p:txBody>
       </p:sp>
       <p:sp>
         <p:nvSpPr>
@@ -15057,6 +15505,10 @@
             <a:prstDash val="solid"/>
           </a:ln>
         </p:spPr>
+        <p:txBody>
+          <a:bodyPr/>
+          <a:p/>
+        </p:txBody>
       </p:sp>
       <p:sp>
         <p:nvSpPr>
@@ -15123,6 +15575,10 @@
             <a:prstDash val="solid"/>
           </a:ln>
         </p:spPr>
+        <p:txBody>
+          <a:bodyPr/>
+          <a:p/>
+        </p:txBody>
       </p:sp>
       <p:sp>
         <p:nvSpPr>
@@ -15189,6 +15645,10 @@
             <a:prstDash val="solid"/>
           </a:ln>
         </p:spPr>
+        <p:txBody>
+          <a:bodyPr/>
+          <a:p/>
+        </p:txBody>
       </p:sp>
       <p:sp>
         <p:nvSpPr>
@@ -15255,6 +15715,10 @@
             <a:prstDash val="solid"/>
           </a:ln>
         </p:spPr>
+        <p:txBody>
+          <a:bodyPr/>
+          <a:p/>
+        </p:txBody>
       </p:sp>
       <p:sp>
         <p:nvSpPr>
@@ -15321,6 +15785,10 @@
             <a:prstDash val="solid"/>
           </a:ln>
         </p:spPr>
+        <p:txBody>
+          <a:bodyPr/>
+          <a:p/>
+        </p:txBody>
       </p:sp>
       <p:sp>
         <p:nvSpPr>
@@ -15387,6 +15855,10 @@
             <a:prstDash val="solid"/>
           </a:ln>
         </p:spPr>
+        <p:txBody>
+          <a:bodyPr/>
+          <a:p/>
+        </p:txBody>
       </p:sp>
       <p:sp>
         <p:nvSpPr>
@@ -15453,6 +15925,10 @@
             <a:prstDash val="solid"/>
           </a:ln>
         </p:spPr>
+        <p:txBody>
+          <a:bodyPr/>
+          <a:p/>
+        </p:txBody>
       </p:sp>
       <p:sp>
         <p:nvSpPr>
@@ -15519,6 +15995,10 @@
             <a:prstDash val="solid"/>
           </a:ln>
         </p:spPr>
+        <p:txBody>
+          <a:bodyPr/>
+          <a:p/>
+        </p:txBody>
       </p:sp>
       <p:sp>
         <p:nvSpPr>
@@ -15585,6 +16065,10 @@
             <a:prstDash val="solid"/>
           </a:ln>
         </p:spPr>
+        <p:txBody>
+          <a:bodyPr/>
+          <a:p/>
+        </p:txBody>
       </p:sp>
       <p:sp>
         <p:nvSpPr>
@@ -15651,6 +16135,10 @@
             <a:prstDash val="solid"/>
           </a:ln>
         </p:spPr>
+        <p:txBody>
+          <a:bodyPr/>
+          <a:p/>
+        </p:txBody>
       </p:sp>
       <p:sp>
         <p:nvSpPr>
@@ -15717,6 +16205,10 @@
             <a:prstDash val="solid"/>
           </a:ln>
         </p:spPr>
+        <p:txBody>
+          <a:bodyPr/>
+          <a:p/>
+        </p:txBody>
       </p:sp>
       <p:sp>
         <p:nvSpPr>
@@ -15783,6 +16275,10 @@
             <a:prstDash val="solid"/>
           </a:ln>
         </p:spPr>
+        <p:txBody>
+          <a:bodyPr/>
+          <a:p/>
+        </p:txBody>
       </p:sp>
       <p:sp>
         <p:nvSpPr>
@@ -15849,6 +16345,10 @@
             <a:prstDash val="solid"/>
           </a:ln>
         </p:spPr>
+        <p:txBody>
+          <a:bodyPr/>
+          <a:p/>
+        </p:txBody>
       </p:sp>
       <p:sp>
         <p:nvSpPr>
@@ -15915,6 +16415,10 @@
             <a:prstDash val="solid"/>
           </a:ln>
         </p:spPr>
+        <p:txBody>
+          <a:bodyPr/>
+          <a:p/>
+        </p:txBody>
       </p:sp>
       <p:sp>
         <p:nvSpPr>
@@ -15981,6 +16485,10 @@
             <a:prstDash val="solid"/>
           </a:ln>
         </p:spPr>
+        <p:txBody>
+          <a:bodyPr/>
+          <a:p/>
+        </p:txBody>
       </p:sp>
       <p:sp>
         <p:nvSpPr>
@@ -16047,6 +16555,10 @@
             <a:prstDash val="solid"/>
           </a:ln>
         </p:spPr>
+        <p:txBody>
+          <a:bodyPr/>
+          <a:p/>
+        </p:txBody>
       </p:sp>
       <p:sp>
         <p:nvSpPr>
@@ -16113,6 +16625,10 @@
             <a:prstDash val="solid"/>
           </a:ln>
         </p:spPr>
+        <p:txBody>
+          <a:bodyPr/>
+          <a:p/>
+        </p:txBody>
       </p:sp>
       <p:sp>
         <p:nvSpPr>
@@ -16179,6 +16695,10 @@
             <a:prstDash val="solid"/>
           </a:ln>
         </p:spPr>
+        <p:txBody>
+          <a:bodyPr/>
+          <a:p/>
+        </p:txBody>
       </p:sp>
       <p:sp>
         <p:nvSpPr>
@@ -16245,6 +16765,10 @@
             <a:prstDash val="solid"/>
           </a:ln>
         </p:spPr>
+        <p:txBody>
+          <a:bodyPr/>
+          <a:p/>
+        </p:txBody>
       </p:sp>
       <p:sp>
         <p:nvSpPr>
@@ -16311,6 +16835,10 @@
             <a:prstDash val="solid"/>
           </a:ln>
         </p:spPr>
+        <p:txBody>
+          <a:bodyPr/>
+          <a:p/>
+        </p:txBody>
       </p:sp>
       <p:sp>
         <p:nvSpPr>
@@ -16377,6 +16905,10 @@
             <a:prstDash val="solid"/>
           </a:ln>
         </p:spPr>
+        <p:txBody>
+          <a:bodyPr/>
+          <a:p/>
+        </p:txBody>
       </p:sp>
       <p:sp>
         <p:nvSpPr>
@@ -16443,6 +16975,10 @@
             <a:prstDash val="solid"/>
           </a:ln>
         </p:spPr>
+        <p:txBody>
+          <a:bodyPr/>
+          <a:p/>
+        </p:txBody>
       </p:sp>
       <p:sp>
         <p:nvSpPr>
@@ -16509,6 +17045,10 @@
             <a:prstDash val="solid"/>
           </a:ln>
         </p:spPr>
+        <p:txBody>
+          <a:bodyPr/>
+          <a:p/>
+        </p:txBody>
       </p:sp>
       <p:sp>
         <p:nvSpPr>
@@ -16575,6 +17115,10 @@
             <a:prstDash val="solid"/>
           </a:ln>
         </p:spPr>
+        <p:txBody>
+          <a:bodyPr/>
+          <a:p/>
+        </p:txBody>
       </p:sp>
       <p:sp>
         <p:nvSpPr>
@@ -16641,6 +17185,10 @@
             <a:prstDash val="solid"/>
           </a:ln>
         </p:spPr>
+        <p:txBody>
+          <a:bodyPr/>
+          <a:p/>
+        </p:txBody>
       </p:sp>
       <p:sp>
         <p:nvSpPr>
@@ -16707,6 +17255,10 @@
             <a:prstDash val="solid"/>
           </a:ln>
         </p:spPr>
+        <p:txBody>
+          <a:bodyPr/>
+          <a:p/>
+        </p:txBody>
       </p:sp>
       <p:sp>
         <p:nvSpPr>
@@ -16773,6 +17325,10 @@
             <a:prstDash val="solid"/>
           </a:ln>
         </p:spPr>
+        <p:txBody>
+          <a:bodyPr/>
+          <a:p/>
+        </p:txBody>
       </p:sp>
       <p:sp>
         <p:nvSpPr>
@@ -16839,6 +17395,10 @@
             <a:prstDash val="solid"/>
           </a:ln>
         </p:spPr>
+        <p:txBody>
+          <a:bodyPr/>
+          <a:p/>
+        </p:txBody>
       </p:sp>
       <p:sp>
         <p:nvSpPr>
@@ -16905,6 +17465,10 @@
             <a:prstDash val="solid"/>
           </a:ln>
         </p:spPr>
+        <p:txBody>
+          <a:bodyPr/>
+          <a:p/>
+        </p:txBody>
       </p:sp>
       <p:sp>
         <p:nvSpPr>
@@ -16971,6 +17535,10 @@
             <a:prstDash val="solid"/>
           </a:ln>
         </p:spPr>
+        <p:txBody>
+          <a:bodyPr/>
+          <a:p/>
+        </p:txBody>
       </p:sp>
       <p:sp>
         <p:nvSpPr>
@@ -17037,6 +17605,10 @@
             <a:prstDash val="solid"/>
           </a:ln>
         </p:spPr>
+        <p:txBody>
+          <a:bodyPr/>
+          <a:p/>
+        </p:txBody>
       </p:sp>
       <p:sp>
         <p:nvSpPr>
@@ -17103,6 +17675,10 @@
             <a:prstDash val="solid"/>
           </a:ln>
         </p:spPr>
+        <p:txBody>
+          <a:bodyPr/>
+          <a:p/>
+        </p:txBody>
       </p:sp>
       <p:sp>
         <p:nvSpPr>
@@ -17169,6 +17745,10 @@
             <a:prstDash val="solid"/>
           </a:ln>
         </p:spPr>
+        <p:txBody>
+          <a:bodyPr/>
+          <a:p/>
+        </p:txBody>
       </p:sp>
       <p:sp>
         <p:nvSpPr>
@@ -17235,6 +17815,10 @@
             <a:prstDash val="solid"/>
           </a:ln>
         </p:spPr>
+        <p:txBody>
+          <a:bodyPr/>
+          <a:p/>
+        </p:txBody>
       </p:sp>
       <p:sp>
         <p:nvSpPr>
@@ -17301,6 +17885,10 @@
             <a:prstDash val="solid"/>
           </a:ln>
         </p:spPr>
+        <p:txBody>
+          <a:bodyPr/>
+          <a:p/>
+        </p:txBody>
       </p:sp>
       <p:sp>
         <p:nvSpPr>
@@ -17367,6 +17955,10 @@
             <a:prstDash val="solid"/>
           </a:ln>
         </p:spPr>
+        <p:txBody>
+          <a:bodyPr/>
+          <a:p/>
+        </p:txBody>
       </p:sp>
       <p:sp>
         <p:nvSpPr>
@@ -17433,6 +18025,10 @@
             <a:prstDash val="solid"/>
           </a:ln>
         </p:spPr>
+        <p:txBody>
+          <a:bodyPr/>
+          <a:p/>
+        </p:txBody>
       </p:sp>
       <p:sp>
         <p:nvSpPr>
@@ -17499,6 +18095,10 @@
             <a:prstDash val="solid"/>
           </a:ln>
         </p:spPr>
+        <p:txBody>
+          <a:bodyPr/>
+          <a:p/>
+        </p:txBody>
       </p:sp>
       <p:sp>
         <p:nvSpPr>
@@ -17565,6 +18165,10 @@
             <a:prstDash val="solid"/>
           </a:ln>
         </p:spPr>
+        <p:txBody>
+          <a:bodyPr/>
+          <a:p/>
+        </p:txBody>
       </p:sp>
       <p:sp>
         <p:nvSpPr>
@@ -17631,6 +18235,10 @@
             <a:prstDash val="solid"/>
           </a:ln>
         </p:spPr>
+        <p:txBody>
+          <a:bodyPr/>
+          <a:p/>
+        </p:txBody>
       </p:sp>
       <p:sp>
         <p:nvSpPr>
@@ -17697,6 +18305,10 @@
             <a:prstDash val="solid"/>
           </a:ln>
         </p:spPr>
+        <p:txBody>
+          <a:bodyPr/>
+          <a:p/>
+        </p:txBody>
       </p:sp>
       <p:sp>
         <p:nvSpPr>
@@ -17763,6 +18375,10 @@
             <a:prstDash val="solid"/>
           </a:ln>
         </p:spPr>
+        <p:txBody>
+          <a:bodyPr/>
+          <a:p/>
+        </p:txBody>
       </p:sp>
       <p:sp>
         <p:nvSpPr>
@@ -17829,6 +18445,10 @@
             <a:prstDash val="solid"/>
           </a:ln>
         </p:spPr>
+        <p:txBody>
+          <a:bodyPr/>
+          <a:p/>
+        </p:txBody>
       </p:sp>
       <p:sp>
         <p:nvSpPr>
@@ -17895,6 +18515,10 @@
             <a:prstDash val="solid"/>
           </a:ln>
         </p:spPr>
+        <p:txBody>
+          <a:bodyPr/>
+          <a:p/>
+        </p:txBody>
       </p:sp>
       <p:sp>
         <p:nvSpPr>
@@ -17961,6 +18585,10 @@
             <a:prstDash val="solid"/>
           </a:ln>
         </p:spPr>
+        <p:txBody>
+          <a:bodyPr/>
+          <a:p/>
+        </p:txBody>
       </p:sp>
       <p:sp>
         <p:nvSpPr>
@@ -18027,6 +18655,10 @@
             <a:prstDash val="solid"/>
           </a:ln>
         </p:spPr>
+        <p:txBody>
+          <a:bodyPr/>
+          <a:p/>
+        </p:txBody>
       </p:sp>
       <p:sp>
         <p:nvSpPr>
@@ -18093,6 +18725,10 @@
             <a:prstDash val="solid"/>
           </a:ln>
         </p:spPr>
+        <p:txBody>
+          <a:bodyPr/>
+          <a:p/>
+        </p:txBody>
       </p:sp>
       <p:sp>
         <p:nvSpPr>
@@ -18159,6 +18795,10 @@
             <a:prstDash val="solid"/>
           </a:ln>
         </p:spPr>
+        <p:txBody>
+          <a:bodyPr/>
+          <a:p/>
+        </p:txBody>
       </p:sp>
       <p:sp>
         <p:nvSpPr>
@@ -18225,6 +18865,10 @@
             <a:prstDash val="solid"/>
           </a:ln>
         </p:spPr>
+        <p:txBody>
+          <a:bodyPr/>
+          <a:p/>
+        </p:txBody>
       </p:sp>
       <p:sp>
         <p:nvSpPr>
@@ -18291,6 +18935,10 @@
             <a:prstDash val="solid"/>
           </a:ln>
         </p:spPr>
+        <p:txBody>
+          <a:bodyPr/>
+          <a:p/>
+        </p:txBody>
       </p:sp>
       <p:sp>
         <p:nvSpPr>
@@ -18357,6 +19005,10 @@
             <a:prstDash val="solid"/>
           </a:ln>
         </p:spPr>
+        <p:txBody>
+          <a:bodyPr/>
+          <a:p/>
+        </p:txBody>
       </p:sp>
       <p:sp>
         <p:nvSpPr>
@@ -18423,6 +19075,10 @@
             <a:prstDash val="solid"/>
           </a:ln>
         </p:spPr>
+        <p:txBody>
+          <a:bodyPr/>
+          <a:p/>
+        </p:txBody>
       </p:sp>
       <p:sp>
         <p:nvSpPr>
@@ -18489,6 +19145,10 @@
             <a:prstDash val="solid"/>
           </a:ln>
         </p:spPr>
+        <p:txBody>
+          <a:bodyPr/>
+          <a:p/>
+        </p:txBody>
       </p:sp>
       <p:sp>
         <p:nvSpPr>
@@ -18555,6 +19215,10 @@
             <a:prstDash val="solid"/>
           </a:ln>
         </p:spPr>
+        <p:txBody>
+          <a:bodyPr/>
+          <a:p/>
+        </p:txBody>
       </p:sp>
       <p:sp>
         <p:nvSpPr>
@@ -18621,6 +19285,10 @@
             <a:prstDash val="solid"/>
           </a:ln>
         </p:spPr>
+        <p:txBody>
+          <a:bodyPr/>
+          <a:p/>
+        </p:txBody>
       </p:sp>
       <p:sp>
         <p:nvSpPr>
@@ -18842,6 +19510,10 @@
             <a:prstDash val="solid"/>
           </a:ln>
         </p:spPr>
+        <p:txBody>
+          <a:bodyPr/>
+          <a:p/>
+        </p:txBody>
       </p:sp>
       <p:sp>
         <p:nvSpPr>
@@ -19094,6 +19766,10 @@
             <a:prstDash val="solid"/>
           </a:ln>
         </p:spPr>
+        <p:txBody>
+          <a:bodyPr/>
+          <a:p/>
+        </p:txBody>
       </p:sp>
       <p:sp>
         <p:nvSpPr>
@@ -19199,6 +19875,10 @@
             <a:prstDash val="solid"/>
           </a:ln>
         </p:spPr>
+        <p:txBody>
+          <a:bodyPr/>
+          <a:p/>
+        </p:txBody>
       </p:sp>
       <p:sp>
         <p:nvSpPr>
@@ -19345,6 +20025,10 @@
             <a:prstDash val="solid"/>
           </a:ln>
         </p:spPr>
+        <p:txBody>
+          <a:bodyPr/>
+          <a:p/>
+        </p:txBody>
       </p:sp>
       <p:sp>
         <p:nvSpPr>
@@ -19491,6 +20175,10 @@
             <a:prstDash val="solid"/>
           </a:ln>
         </p:spPr>
+        <p:txBody>
+          <a:bodyPr/>
+          <a:p/>
+        </p:txBody>
       </p:sp>
       <p:sp>
         <p:nvSpPr>
@@ -19637,6 +20325,10 @@
             <a:prstDash val="solid"/>
           </a:ln>
         </p:spPr>
+        <p:txBody>
+          <a:bodyPr/>
+          <a:p/>
+        </p:txBody>
       </p:sp>
       <p:sp>
         <p:nvSpPr>
@@ -19783,6 +20475,10 @@
             <a:prstDash val="solid"/>
           </a:ln>
         </p:spPr>
+        <p:txBody>
+          <a:bodyPr/>
+          <a:p/>
+        </p:txBody>
       </p:sp>
       <p:sp>
         <p:nvSpPr>
@@ -19929,6 +20625,10 @@
             <a:prstDash val="solid"/>
           </a:ln>
         </p:spPr>
+        <p:txBody>
+          <a:bodyPr/>
+          <a:p/>
+        </p:txBody>
       </p:sp>
       <p:sp>
         <p:nvSpPr>
@@ -20174,6 +20874,10 @@
             <a:prstDash val="solid"/>
           </a:ln>
         </p:spPr>
+        <p:txBody>
+          <a:bodyPr/>
+          <a:p/>
+        </p:txBody>
       </p:sp>
       <p:sp>
         <p:nvSpPr>
@@ -20271,6 +20975,10 @@
             <a:prstDash val="solid"/>
           </a:ln>
         </p:spPr>
+        <p:txBody>
+          <a:bodyPr/>
+          <a:p/>
+        </p:txBody>
       </p:sp>
       <p:sp>
         <p:nvSpPr>
@@ -20334,6 +21042,10 @@
             <a:prstDash val="solid"/>
           </a:ln>
         </p:spPr>
+        <p:txBody>
+          <a:bodyPr/>
+          <a:p/>
+        </p:txBody>
       </p:sp>
       <p:sp>
         <p:nvSpPr>
@@ -20481,6 +21193,10 @@
             <a:prstDash val="solid"/>
           </a:ln>
         </p:spPr>
+        <p:txBody>
+          <a:bodyPr/>
+          <a:p/>
+        </p:txBody>
       </p:sp>
       <p:sp>
         <p:nvSpPr>
@@ -20733,6 +21449,10 @@
             <a:prstDash val="solid"/>
           </a:ln>
         </p:spPr>
+        <p:txBody>
+          <a:bodyPr/>
+          <a:p/>
+        </p:txBody>
       </p:sp>
       <p:sp>
         <p:nvSpPr>
@@ -20838,6 +21558,10 @@
             <a:prstDash val="solid"/>
           </a:ln>
         </p:spPr>
+        <p:txBody>
+          <a:bodyPr/>
+          <a:p/>
+        </p:txBody>
       </p:sp>
       <p:sp>
         <p:nvSpPr>
@@ -20984,6 +21708,10 @@
             <a:prstDash val="solid"/>
           </a:ln>
         </p:spPr>
+        <p:txBody>
+          <a:bodyPr/>
+          <a:p/>
+        </p:txBody>
       </p:sp>
       <p:sp>
         <p:nvSpPr>
@@ -21130,6 +21858,10 @@
             <a:prstDash val="solid"/>
           </a:ln>
         </p:spPr>
+        <p:txBody>
+          <a:bodyPr/>
+          <a:p/>
+        </p:txBody>
       </p:sp>
       <p:sp>
         <p:nvSpPr>
@@ -21276,6 +22008,10 @@
             <a:prstDash val="solid"/>
           </a:ln>
         </p:spPr>
+        <p:txBody>
+          <a:bodyPr/>
+          <a:p/>
+        </p:txBody>
       </p:sp>
       <p:sp>
         <p:nvSpPr>
@@ -21422,6 +22158,10 @@
             <a:prstDash val="solid"/>
           </a:ln>
         </p:spPr>
+        <p:txBody>
+          <a:bodyPr/>
+          <a:p/>
+        </p:txBody>
       </p:sp>
       <p:sp>
         <p:nvSpPr>
@@ -21568,6 +22308,10 @@
             <a:prstDash val="solid"/>
           </a:ln>
         </p:spPr>
+        <p:txBody>
+          <a:bodyPr/>
+          <a:p/>
+        </p:txBody>
       </p:sp>
       <p:sp>
         <p:nvSpPr>
@@ -21813,6 +22557,10 @@
             <a:prstDash val="solid"/>
           </a:ln>
         </p:spPr>
+        <p:txBody>
+          <a:bodyPr/>
+          <a:p/>
+        </p:txBody>
       </p:sp>
       <p:sp>
         <p:nvSpPr>
@@ -21910,6 +22658,10 @@
             <a:prstDash val="solid"/>
           </a:ln>
         </p:spPr>
+        <p:txBody>
+          <a:bodyPr/>
+          <a:p/>
+        </p:txBody>
       </p:sp>
       <p:sp>
         <p:nvSpPr>
@@ -21973,6 +22725,10 @@
             <a:prstDash val="solid"/>
           </a:ln>
         </p:spPr>
+        <p:txBody>
+          <a:bodyPr/>
+          <a:p/>
+        </p:txBody>
       </p:sp>
       <p:sp>
         <p:nvSpPr>
@@ -22120,6 +22876,10 @@
             <a:prstDash val="solid"/>
           </a:ln>
         </p:spPr>
+        <p:txBody>
+          <a:bodyPr/>
+          <a:p/>
+        </p:txBody>
       </p:sp>
       <p:sp>
         <p:nvSpPr>
@@ -22372,6 +23132,10 @@
             <a:prstDash val="solid"/>
           </a:ln>
         </p:spPr>
+        <p:txBody>
+          <a:bodyPr/>
+          <a:p/>
+        </p:txBody>
       </p:sp>
       <p:sp>
         <p:nvSpPr>
@@ -22477,6 +23241,10 @@
             <a:prstDash val="solid"/>
           </a:ln>
         </p:spPr>
+        <p:txBody>
+          <a:bodyPr/>
+          <a:p/>
+        </p:txBody>
       </p:sp>
       <p:sp>
         <p:nvSpPr>
@@ -22623,6 +23391,10 @@
             <a:prstDash val="solid"/>
           </a:ln>
         </p:spPr>
+        <p:txBody>
+          <a:bodyPr/>
+          <a:p/>
+        </p:txBody>
       </p:sp>
       <p:sp>
         <p:nvSpPr>
@@ -22769,6 +23541,10 @@
             <a:prstDash val="solid"/>
           </a:ln>
         </p:spPr>
+        <p:txBody>
+          <a:bodyPr/>
+          <a:p/>
+        </p:txBody>
       </p:sp>
       <p:sp>
         <p:nvSpPr>
@@ -22915,6 +23691,10 @@
             <a:prstDash val="solid"/>
           </a:ln>
         </p:spPr>
+        <p:txBody>
+          <a:bodyPr/>
+          <a:p/>
+        </p:txBody>
       </p:sp>
       <p:sp>
         <p:nvSpPr>
@@ -23061,6 +23841,10 @@
             <a:prstDash val="solid"/>
           </a:ln>
         </p:spPr>
+        <p:txBody>
+          <a:bodyPr/>
+          <a:p/>
+        </p:txBody>
       </p:sp>
       <p:sp>
         <p:nvSpPr>
@@ -23207,6 +23991,10 @@
             <a:prstDash val="solid"/>
           </a:ln>
         </p:spPr>
+        <p:txBody>
+          <a:bodyPr/>
+          <a:p/>
+        </p:txBody>
       </p:sp>
       <p:sp>
         <p:nvSpPr>
@@ -23452,6 +24240,10 @@
             <a:prstDash val="solid"/>
           </a:ln>
         </p:spPr>
+        <p:txBody>
+          <a:bodyPr/>
+          <a:p/>
+        </p:txBody>
       </p:sp>
       <p:sp>
         <p:nvSpPr>
@@ -23549,6 +24341,10 @@
             <a:prstDash val="solid"/>
           </a:ln>
         </p:spPr>
+        <p:txBody>
+          <a:bodyPr/>
+          <a:p/>
+        </p:txBody>
       </p:sp>
       <p:sp>
         <p:nvSpPr>
@@ -23612,6 +24408,10 @@
             <a:prstDash val="solid"/>
           </a:ln>
         </p:spPr>
+        <p:txBody>
+          <a:bodyPr/>
+          <a:p/>
+        </p:txBody>
       </p:sp>
       <p:sp>
         <p:nvSpPr>
@@ -23759,6 +24559,10 @@
             <a:prstDash val="solid"/>
           </a:ln>
         </p:spPr>
+        <p:txBody>
+          <a:bodyPr/>
+          <a:p/>
+        </p:txBody>
       </p:sp>
       <p:sp>
         <p:nvSpPr>
@@ -24011,6 +24815,10 @@
             <a:prstDash val="solid"/>
           </a:ln>
         </p:spPr>
+        <p:txBody>
+          <a:bodyPr/>
+          <a:p/>
+        </p:txBody>
       </p:sp>
       <p:sp>
         <p:nvSpPr>
@@ -24116,6 +24924,10 @@
             <a:prstDash val="solid"/>
           </a:ln>
         </p:spPr>
+        <p:txBody>
+          <a:bodyPr/>
+          <a:p/>
+        </p:txBody>
       </p:sp>
       <p:sp>
         <p:nvSpPr>
@@ -24262,6 +25074,10 @@
             <a:prstDash val="solid"/>
           </a:ln>
         </p:spPr>
+        <p:txBody>
+          <a:bodyPr/>
+          <a:p/>
+        </p:txBody>
       </p:sp>
       <p:sp>
         <p:nvSpPr>
@@ -24408,6 +25224,10 @@
             <a:prstDash val="solid"/>
           </a:ln>
         </p:spPr>
+        <p:txBody>
+          <a:bodyPr/>
+          <a:p/>
+        </p:txBody>
       </p:sp>
       <p:sp>
         <p:nvSpPr>
@@ -24554,6 +25374,10 @@
             <a:prstDash val="solid"/>
           </a:ln>
         </p:spPr>
+        <p:txBody>
+          <a:bodyPr/>
+          <a:p/>
+        </p:txBody>
       </p:sp>
       <p:sp>
         <p:nvSpPr>
@@ -24700,6 +25524,10 @@
             <a:prstDash val="solid"/>
           </a:ln>
         </p:spPr>
+        <p:txBody>
+          <a:bodyPr/>
+          <a:p/>
+        </p:txBody>
       </p:sp>
       <p:sp>
         <p:nvSpPr>
@@ -24846,6 +25674,10 @@
             <a:prstDash val="solid"/>
           </a:ln>
         </p:spPr>
+        <p:txBody>
+          <a:bodyPr/>
+          <a:p/>
+        </p:txBody>
       </p:sp>
       <p:sp>
         <p:nvSpPr>
@@ -25091,6 +25923,10 @@
             <a:prstDash val="solid"/>
           </a:ln>
         </p:spPr>
+        <p:txBody>
+          <a:bodyPr/>
+          <a:p/>
+        </p:txBody>
       </p:sp>
       <p:sp>
         <p:nvSpPr>
@@ -25188,6 +26024,10 @@
             <a:prstDash val="solid"/>
           </a:ln>
         </p:spPr>
+        <p:txBody>
+          <a:bodyPr/>
+          <a:p/>
+        </p:txBody>
       </p:sp>
       <p:sp>
         <p:nvSpPr>
@@ -25251,6 +26091,10 @@
             <a:prstDash val="solid"/>
           </a:ln>
         </p:spPr>
+        <p:txBody>
+          <a:bodyPr/>
+          <a:p/>
+        </p:txBody>
       </p:sp>
       <p:sp>
         <p:nvSpPr>
@@ -25398,6 +26242,10 @@
             <a:prstDash val="solid"/>
           </a:ln>
         </p:spPr>
+        <p:txBody>
+          <a:bodyPr/>
+          <a:p/>
+        </p:txBody>
       </p:sp>
       <p:sp>
         <p:nvSpPr>
@@ -25650,6 +26498,10 @@
             <a:prstDash val="solid"/>
           </a:ln>
         </p:spPr>
+        <p:txBody>
+          <a:bodyPr/>
+          <a:p/>
+        </p:txBody>
       </p:sp>
       <p:sp>
         <p:nvSpPr>
@@ -25755,6 +26607,10 @@
             <a:prstDash val="solid"/>
           </a:ln>
         </p:spPr>
+        <p:txBody>
+          <a:bodyPr/>
+          <a:p/>
+        </p:txBody>
       </p:sp>
       <p:sp>
         <p:nvSpPr>
@@ -25818,6 +26674,10 @@
             <a:prstDash val="solid"/>
           </a:ln>
         </p:spPr>
+        <p:txBody>
+          <a:bodyPr/>
+          <a:p/>
+        </p:txBody>
       </p:sp>
       <p:sp>
         <p:nvSpPr>
@@ -25919,6 +26779,10 @@
             <a:prstDash val="solid"/>
           </a:ln>
         </p:spPr>
+        <p:txBody>
+          <a:bodyPr/>
+          <a:p/>
+        </p:txBody>
       </p:sp>
       <p:sp>
         <p:nvSpPr>
@@ -26020,6 +26884,10 @@
             <a:prstDash val="solid"/>
           </a:ln>
         </p:spPr>
+        <p:txBody>
+          <a:bodyPr/>
+          <a:p/>
+        </p:txBody>
       </p:sp>
       <p:sp>
         <p:nvSpPr>
@@ -26121,6 +26989,10 @@
             <a:prstDash val="solid"/>
           </a:ln>
         </p:spPr>
+        <p:txBody>
+          <a:bodyPr/>
+          <a:p/>
+        </p:txBody>
       </p:sp>
       <p:sp>
         <p:nvSpPr>
@@ -26222,6 +27094,10 @@
             <a:prstDash val="solid"/>
           </a:ln>
         </p:spPr>
+        <p:txBody>
+          <a:bodyPr/>
+          <a:p/>
+        </p:txBody>
       </p:sp>
       <p:sp>
         <p:nvSpPr>
@@ -26323,6 +27199,10 @@
             <a:prstDash val="solid"/>
           </a:ln>
         </p:spPr>
+        <p:txBody>
+          <a:bodyPr/>
+          <a:p/>
+        </p:txBody>
       </p:sp>
       <p:sp>
         <p:nvSpPr>
@@ -26388,6 +27268,10 @@
             <a:prstDash val="solid"/>
           </a:ln>
         </p:spPr>
+        <p:txBody>
+          <a:bodyPr/>
+          <a:p/>
+        </p:txBody>
       </p:sp>
       <p:sp>
         <p:nvSpPr>
@@ -26449,6 +27333,10 @@
             <a:prstDash val="solid"/>
           </a:ln>
         </p:spPr>
+        <p:txBody>
+          <a:bodyPr/>
+          <a:p/>
+        </p:txBody>
       </p:sp>
       <p:sp>
         <p:nvSpPr>
@@ -26515,6 +27403,10 @@
             <a:prstDash val="solid"/>
           </a:ln>
         </p:spPr>
+        <p:txBody>
+          <a:bodyPr/>
+          <a:p/>
+        </p:txBody>
       </p:sp>
       <p:sp>
         <p:nvSpPr>
@@ -26581,6 +27473,10 @@
             <a:prstDash val="solid"/>
           </a:ln>
         </p:spPr>
+        <p:txBody>
+          <a:bodyPr/>
+          <a:p/>
+        </p:txBody>
       </p:sp>
       <p:sp>
         <p:nvSpPr>
@@ -26647,6 +27543,10 @@
             <a:prstDash val="solid"/>
           </a:ln>
         </p:spPr>
+        <p:txBody>
+          <a:bodyPr/>
+          <a:p/>
+        </p:txBody>
       </p:sp>
       <p:sp>
         <p:nvSpPr>
@@ -26868,6 +27768,10 @@
             <a:prstDash val="solid"/>
           </a:ln>
         </p:spPr>
+        <p:txBody>
+          <a:bodyPr/>
+          <a:p/>
+        </p:txBody>
       </p:sp>
       <p:sp>
         <p:nvSpPr>
@@ -27120,6 +28024,10 @@
             <a:prstDash val="solid"/>
           </a:ln>
         </p:spPr>
+        <p:txBody>
+          <a:bodyPr/>
+          <a:p/>
+        </p:txBody>
       </p:sp>
       <p:sp>
         <p:nvSpPr>
@@ -27225,6 +28133,10 @@
             <a:prstDash val="solid"/>
           </a:ln>
         </p:spPr>
+        <p:txBody>
+          <a:bodyPr/>
+          <a:p/>
+        </p:txBody>
       </p:sp>
       <p:sp>
         <p:nvSpPr>
@@ -27371,6 +28283,10 @@
             <a:prstDash val="solid"/>
           </a:ln>
         </p:spPr>
+        <p:txBody>
+          <a:bodyPr/>
+          <a:p/>
+        </p:txBody>
       </p:sp>
       <p:sp>
         <p:nvSpPr>
@@ -27517,6 +28433,10 @@
             <a:prstDash val="solid"/>
           </a:ln>
         </p:spPr>
+        <p:txBody>
+          <a:bodyPr/>
+          <a:p/>
+        </p:txBody>
       </p:sp>
       <p:sp>
         <p:nvSpPr>
@@ -27663,6 +28583,10 @@
             <a:prstDash val="solid"/>
           </a:ln>
         </p:spPr>
+        <p:txBody>
+          <a:bodyPr/>
+          <a:p/>
+        </p:txBody>
       </p:sp>
       <p:sp>
         <p:nvSpPr>
@@ -27809,6 +28733,10 @@
             <a:prstDash val="solid"/>
           </a:ln>
         </p:spPr>
+        <p:txBody>
+          <a:bodyPr/>
+          <a:p/>
+        </p:txBody>
       </p:sp>
       <p:sp>
         <p:nvSpPr>
@@ -27955,6 +28883,10 @@
             <a:prstDash val="solid"/>
           </a:ln>
         </p:spPr>
+        <p:txBody>
+          <a:bodyPr/>
+          <a:p/>
+        </p:txBody>
       </p:sp>
       <p:sp>
         <p:nvSpPr>
@@ -28200,6 +29132,10 @@
             <a:prstDash val="solid"/>
           </a:ln>
         </p:spPr>
+        <p:txBody>
+          <a:bodyPr/>
+          <a:p/>
+        </p:txBody>
       </p:sp>
       <p:sp>
         <p:nvSpPr>
@@ -28297,6 +29233,10 @@
             <a:prstDash val="solid"/>
           </a:ln>
         </p:spPr>
+        <p:txBody>
+          <a:bodyPr/>
+          <a:p/>
+        </p:txBody>
       </p:sp>
       <p:sp>
         <p:nvSpPr>
@@ -28360,6 +29300,10 @@
             <a:prstDash val="solid"/>
           </a:ln>
         </p:spPr>
+        <p:txBody>
+          <a:bodyPr/>
+          <a:p/>
+        </p:txBody>
       </p:sp>
       <p:sp>
         <p:nvSpPr>
@@ -28507,6 +29451,10 @@
             <a:prstDash val="solid"/>
           </a:ln>
         </p:spPr>
+        <p:txBody>
+          <a:bodyPr/>
+          <a:p/>
+        </p:txBody>
       </p:sp>
       <p:sp>
         <p:nvSpPr>
@@ -28759,6 +29707,10 @@
             <a:prstDash val="solid"/>
           </a:ln>
         </p:spPr>
+        <p:txBody>
+          <a:bodyPr/>
+          <a:p/>
+        </p:txBody>
       </p:sp>
       <p:sp>
         <p:nvSpPr>
@@ -28864,6 +29816,10 @@
             <a:prstDash val="solid"/>
           </a:ln>
         </p:spPr>
+        <p:txBody>
+          <a:bodyPr/>
+          <a:p/>
+        </p:txBody>
       </p:sp>
       <p:sp>
         <p:nvSpPr>
@@ -29010,6 +29966,10 @@
             <a:prstDash val="solid"/>
           </a:ln>
         </p:spPr>
+        <p:txBody>
+          <a:bodyPr/>
+          <a:p/>
+        </p:txBody>
       </p:sp>
       <p:sp>
         <p:nvSpPr>
@@ -29156,6 +30116,10 @@
             <a:prstDash val="solid"/>
           </a:ln>
         </p:spPr>
+        <p:txBody>
+          <a:bodyPr/>
+          <a:p/>
+        </p:txBody>
       </p:sp>
       <p:sp>
         <p:nvSpPr>
@@ -29302,6 +30266,10 @@
             <a:prstDash val="solid"/>
           </a:ln>
         </p:spPr>
+        <p:txBody>
+          <a:bodyPr/>
+          <a:p/>
+        </p:txBody>
       </p:sp>
       <p:sp>
         <p:nvSpPr>
@@ -29448,6 +30416,10 @@
             <a:prstDash val="solid"/>
           </a:ln>
         </p:spPr>
+        <p:txBody>
+          <a:bodyPr/>
+          <a:p/>
+        </p:txBody>
       </p:sp>
       <p:sp>
         <p:nvSpPr>
@@ -29594,6 +30566,10 @@
             <a:prstDash val="solid"/>
           </a:ln>
         </p:spPr>
+        <p:txBody>
+          <a:bodyPr/>
+          <a:p/>
+        </p:txBody>
       </p:sp>
       <p:sp>
         <p:nvSpPr>
@@ -29839,6 +30815,10 @@
             <a:prstDash val="solid"/>
           </a:ln>
         </p:spPr>
+        <p:txBody>
+          <a:bodyPr/>
+          <a:p/>
+        </p:txBody>
       </p:sp>
       <p:sp>
         <p:nvSpPr>
@@ -29936,6 +30916,10 @@
             <a:prstDash val="solid"/>
           </a:ln>
         </p:spPr>
+        <p:txBody>
+          <a:bodyPr/>
+          <a:p/>
+        </p:txBody>
       </p:sp>
       <p:sp>
         <p:nvSpPr>
@@ -29999,6 +30983,10 @@
             <a:prstDash val="solid"/>
           </a:ln>
         </p:spPr>
+        <p:txBody>
+          <a:bodyPr/>
+          <a:p/>
+        </p:txBody>
       </p:sp>
       <p:sp>
         <p:nvSpPr>
@@ -30146,6 +31134,10 @@
             <a:prstDash val="solid"/>
           </a:ln>
         </p:spPr>
+        <p:txBody>
+          <a:bodyPr/>
+          <a:p/>
+        </p:txBody>
       </p:sp>
       <p:sp>
         <p:nvSpPr>
@@ -30398,6 +31390,10 @@
             <a:prstDash val="solid"/>
           </a:ln>
         </p:spPr>
+        <p:txBody>
+          <a:bodyPr/>
+          <a:p/>
+        </p:txBody>
       </p:sp>
       <p:sp>
         <p:nvSpPr>
@@ -30503,6 +31499,10 @@
             <a:prstDash val="solid"/>
           </a:ln>
         </p:spPr>
+        <p:txBody>
+          <a:bodyPr/>
+          <a:p/>
+        </p:txBody>
       </p:sp>
       <p:sp>
         <p:nvSpPr>
@@ -30606,6 +31606,10 @@
             <a:prstDash val="solid"/>
           </a:ln>
         </p:spPr>
+        <p:txBody>
+          <a:bodyPr/>
+          <a:p/>
+        </p:txBody>
       </p:sp>
       <p:sp>
         <p:nvSpPr>
@@ -30709,6 +31713,10 @@
             <a:prstDash val="solid"/>
           </a:ln>
         </p:spPr>
+        <p:txBody>
+          <a:bodyPr/>
+          <a:p/>
+        </p:txBody>
       </p:sp>
       <p:sp>
         <p:nvSpPr>
@@ -30812,6 +31820,10 @@
             <a:prstDash val="solid"/>
           </a:ln>
         </p:spPr>
+        <p:txBody>
+          <a:bodyPr/>
+          <a:p/>
+        </p:txBody>
       </p:sp>
       <p:sp>
         <p:nvSpPr>
@@ -31098,6 +32110,10 @@
             <a:prstDash val="solid"/>
           </a:ln>
         </p:spPr>
+        <p:txBody>
+          <a:bodyPr/>
+          <a:p/>
+        </p:txBody>
       </p:sp>
       <p:sp>
         <p:nvSpPr>
@@ -31350,6 +32366,10 @@
             <a:prstDash val="solid"/>
           </a:ln>
         </p:spPr>
+        <p:txBody>
+          <a:bodyPr/>
+          <a:p/>
+        </p:txBody>
       </p:sp>
       <p:sp>
         <p:nvSpPr>
@@ -31455,6 +32475,10 @@
             <a:prstDash val="solid"/>
           </a:ln>
         </p:spPr>
+        <p:txBody>
+          <a:bodyPr/>
+          <a:p/>
+        </p:txBody>
       </p:sp>
       <p:sp>
         <p:nvSpPr>
@@ -31558,6 +32582,10 @@
             <a:prstDash val="solid"/>
           </a:ln>
         </p:spPr>
+        <p:txBody>
+          <a:bodyPr/>
+          <a:p/>
+        </p:txBody>
       </p:sp>
       <p:sp>
         <p:nvSpPr>
@@ -31661,6 +32689,10 @@
             <a:prstDash val="solid"/>
           </a:ln>
         </p:spPr>
+        <p:txBody>
+          <a:bodyPr/>
+          <a:p/>
+        </p:txBody>
       </p:sp>
       <p:sp>
         <p:nvSpPr>
@@ -31764,6 +32796,10 @@
             <a:prstDash val="solid"/>
           </a:ln>
         </p:spPr>
+        <p:txBody>
+          <a:bodyPr/>
+          <a:p/>
+        </p:txBody>
       </p:sp>
       <p:sp>
         <p:nvSpPr>
@@ -32050,6 +33086,10 @@
             <a:prstDash val="solid"/>
           </a:ln>
         </p:spPr>
+        <p:txBody>
+          <a:bodyPr/>
+          <a:p/>
+        </p:txBody>
       </p:sp>
       <p:sp>
         <p:nvSpPr>
@@ -32302,6 +33342,10 @@
             <a:prstDash val="solid"/>
           </a:ln>
         </p:spPr>
+        <p:txBody>
+          <a:bodyPr/>
+          <a:p/>
+        </p:txBody>
       </p:sp>
       <p:sp>
         <p:nvSpPr>
@@ -32405,6 +33449,10 @@
             <a:prstDash val="solid"/>
           </a:ln>
         </p:spPr>
+        <p:txBody>
+          <a:bodyPr/>
+          <a:p/>
+        </p:txBody>
       </p:sp>
       <p:sp>
         <p:nvSpPr>
@@ -32471,6 +33519,10 @@
             <a:prstDash val="solid"/>
           </a:ln>
         </p:spPr>
+        <p:txBody>
+          <a:bodyPr/>
+          <a:p/>
+        </p:txBody>
       </p:sp>
       <p:sp>
         <p:nvSpPr>
@@ -32537,6 +33589,10 @@
             <a:prstDash val="solid"/>
           </a:ln>
         </p:spPr>
+        <p:txBody>
+          <a:bodyPr/>
+          <a:p/>
+        </p:txBody>
       </p:sp>
       <p:sp>
         <p:nvSpPr>
@@ -32603,6 +33659,10 @@
             <a:prstDash val="solid"/>
           </a:ln>
         </p:spPr>
+        <p:txBody>
+          <a:bodyPr/>
+          <a:p/>
+        </p:txBody>
       </p:sp>
       <p:sp>
         <p:nvSpPr>
@@ -32669,6 +33729,10 @@
             <a:prstDash val="solid"/>
           </a:ln>
         </p:spPr>
+        <p:txBody>
+          <a:bodyPr/>
+          <a:p/>
+        </p:txBody>
       </p:sp>
       <p:sp>
         <p:nvSpPr>
@@ -32735,6 +33799,10 @@
             <a:prstDash val="solid"/>
           </a:ln>
         </p:spPr>
+        <p:txBody>
+          <a:bodyPr/>
+          <a:p/>
+        </p:txBody>
       </p:sp>
       <p:sp>
         <p:nvSpPr>
@@ -32801,6 +33869,10 @@
             <a:prstDash val="solid"/>
           </a:ln>
         </p:spPr>
+        <p:txBody>
+          <a:bodyPr/>
+          <a:p/>
+        </p:txBody>
       </p:sp>
       <p:sp>
         <p:nvSpPr>
@@ -32867,6 +33939,10 @@
             <a:prstDash val="solid"/>
           </a:ln>
         </p:spPr>
+        <p:txBody>
+          <a:bodyPr/>
+          <a:p/>
+        </p:txBody>
       </p:sp>
       <p:sp>
         <p:nvSpPr>
@@ -32933,6 +34009,10 @@
             <a:prstDash val="solid"/>
           </a:ln>
         </p:spPr>
+        <p:txBody>
+          <a:bodyPr/>
+          <a:p/>
+        </p:txBody>
       </p:sp>
       <p:sp>
         <p:nvSpPr>
@@ -32999,6 +34079,10 @@
             <a:prstDash val="solid"/>
           </a:ln>
         </p:spPr>
+        <p:txBody>
+          <a:bodyPr/>
+          <a:p/>
+        </p:txBody>
       </p:sp>
       <p:sp>
         <p:nvSpPr>
@@ -33065,6 +34149,10 @@
             <a:prstDash val="solid"/>
           </a:ln>
         </p:spPr>
+        <p:txBody>
+          <a:bodyPr/>
+          <a:p/>
+        </p:txBody>
       </p:sp>
       <p:sp>
         <p:nvSpPr>
@@ -33131,6 +34219,10 @@
             <a:prstDash val="solid"/>
           </a:ln>
         </p:spPr>
+        <p:txBody>
+          <a:bodyPr/>
+          <a:p/>
+        </p:txBody>
       </p:sp>
       <p:sp>
         <p:nvSpPr>
@@ -33197,6 +34289,10 @@
             <a:prstDash val="solid"/>
           </a:ln>
         </p:spPr>
+        <p:txBody>
+          <a:bodyPr/>
+          <a:p/>
+        </p:txBody>
       </p:sp>
       <p:sp>
         <p:nvSpPr>
@@ -33263,6 +34359,10 @@
             <a:prstDash val="solid"/>
           </a:ln>
         </p:spPr>
+        <p:txBody>
+          <a:bodyPr/>
+          <a:p/>
+        </p:txBody>
       </p:sp>
       <p:sp>
         <p:nvSpPr>
@@ -33329,6 +34429,10 @@
             <a:prstDash val="solid"/>
           </a:ln>
         </p:spPr>
+        <p:txBody>
+          <a:bodyPr/>
+          <a:p/>
+        </p:txBody>
       </p:sp>
       <p:sp>
         <p:nvSpPr>
@@ -33395,6 +34499,10 @@
             <a:prstDash val="solid"/>
           </a:ln>
         </p:spPr>
+        <p:txBody>
+          <a:bodyPr/>
+          <a:p/>
+        </p:txBody>
       </p:sp>
       <p:sp>
         <p:nvSpPr>
@@ -33461,6 +34569,10 @@
             <a:prstDash val="solid"/>
           </a:ln>
         </p:spPr>
+        <p:txBody>
+          <a:bodyPr/>
+          <a:p/>
+        </p:txBody>
       </p:sp>
       <p:sp>
         <p:nvSpPr>
@@ -33527,6 +34639,10 @@
             <a:prstDash val="solid"/>
           </a:ln>
         </p:spPr>
+        <p:txBody>
+          <a:bodyPr/>
+          <a:p/>
+        </p:txBody>
       </p:sp>
       <p:sp>
         <p:nvSpPr>
@@ -33593,6 +34709,10 @@
             <a:prstDash val="solid"/>
           </a:ln>
         </p:spPr>
+        <p:txBody>
+          <a:bodyPr/>
+          <a:p/>
+        </p:txBody>
       </p:sp>
       <p:sp>
         <p:nvSpPr>
@@ -33659,6 +34779,10 @@
             <a:prstDash val="solid"/>
           </a:ln>
         </p:spPr>
+        <p:txBody>
+          <a:bodyPr/>
+          <a:p/>
+        </p:txBody>
       </p:sp>
       <p:sp>
         <p:nvSpPr>
@@ -33725,6 +34849,10 @@
             <a:prstDash val="solid"/>
           </a:ln>
         </p:spPr>
+        <p:txBody>
+          <a:bodyPr/>
+          <a:p/>
+        </p:txBody>
       </p:sp>
       <p:sp>
         <p:nvSpPr>
@@ -33931,6 +35059,10 @@
             <a:prstDash val="solid"/>
           </a:ln>
         </p:spPr>
+        <p:txBody>
+          <a:bodyPr/>
+          <a:p/>
+        </p:txBody>
       </p:sp>
       <p:sp>
         <p:nvSpPr>
@@ -34148,6 +35280,10 @@
             <a:prstDash val="solid"/>
           </a:ln>
         </p:spPr>
+        <p:txBody>
+          <a:bodyPr/>
+          <a:p/>
+        </p:txBody>
       </p:sp>
       <p:sp>
         <p:nvSpPr>
@@ -34464,6 +35600,10 @@
             <a:prstDash val="solid"/>
           </a:ln>
         </p:spPr>
+        <p:txBody>
+          <a:bodyPr/>
+          <a:p/>
+        </p:txBody>
       </p:sp>
       <p:sp>
         <p:nvSpPr>
@@ -34569,6 +35709,10 @@
             <a:prstDash val="solid"/>
           </a:ln>
         </p:spPr>
+        <p:txBody>
+          <a:bodyPr/>
+          <a:p/>
+        </p:txBody>
       </p:sp>
       <p:sp>
         <p:nvSpPr>
@@ -34715,6 +35859,10 @@
             <a:prstDash val="solid"/>
           </a:ln>
         </p:spPr>
+        <p:txBody>
+          <a:bodyPr/>
+          <a:p/>
+        </p:txBody>
       </p:sp>
       <p:sp>
         <p:nvSpPr>
@@ -34861,6 +36009,10 @@
             <a:prstDash val="solid"/>
           </a:ln>
         </p:spPr>
+        <p:txBody>
+          <a:bodyPr/>
+          <a:p/>
+        </p:txBody>
       </p:sp>
       <p:sp>
         <p:nvSpPr>
@@ -35007,6 +36159,10 @@
             <a:prstDash val="solid"/>
           </a:ln>
         </p:spPr>
+        <p:txBody>
+          <a:bodyPr/>
+          <a:p/>
+        </p:txBody>
       </p:sp>
       <p:sp>
         <p:nvSpPr>
@@ -35153,6 +36309,10 @@
             <a:prstDash val="solid"/>
           </a:ln>
         </p:spPr>
+        <p:txBody>
+          <a:bodyPr/>
+          <a:p/>
+        </p:txBody>
       </p:sp>
       <p:sp>
         <p:nvSpPr>
@@ -35338,6 +36498,10 @@
             <a:prstDash val="solid"/>
           </a:ln>
         </p:spPr>
+        <p:txBody>
+          <a:bodyPr/>
+          <a:p/>
+        </p:txBody>
       </p:sp>
       <p:sp>
         <p:nvSpPr>
@@ -35443,6 +36607,10 @@
             <a:prstDash val="solid"/>
           </a:ln>
         </p:spPr>
+        <p:txBody>
+          <a:bodyPr/>
+          <a:p/>
+        </p:txBody>
       </p:sp>
       <p:sp>
         <p:nvSpPr>
@@ -35548,6 +36716,10 @@
             <a:prstDash val="solid"/>
           </a:ln>
         </p:spPr>
+        <p:txBody>
+          <a:bodyPr/>
+          <a:p/>
+        </p:txBody>
       </p:sp>
       <p:sp>
         <p:nvSpPr>
@@ -35653,6 +36825,10 @@
             <a:prstDash val="solid"/>
           </a:ln>
         </p:spPr>
+        <p:txBody>
+          <a:bodyPr/>
+          <a:p/>
+        </p:txBody>
       </p:sp>
       <p:sp>
         <p:nvSpPr>
@@ -35758,6 +36934,10 @@
             <a:prstDash val="solid"/>
           </a:ln>
         </p:spPr>
+        <p:txBody>
+          <a:bodyPr/>
+          <a:p/>
+        </p:txBody>
       </p:sp>
       <p:sp>
         <p:nvSpPr>
@@ -35820,6 +37000,10 @@
             <a:prstDash val="solid"/>
           </a:ln>
         </p:spPr>
+        <p:txBody>
+          <a:bodyPr/>
+          <a:p/>
+        </p:txBody>
       </p:sp>
       <p:sp>
         <p:nvSpPr>
@@ -35985,6 +37169,10 @@
             <a:prstDash val="solid"/>
           </a:ln>
         </p:spPr>
+        <p:txBody>
+          <a:bodyPr/>
+          <a:p/>
+        </p:txBody>
       </p:sp>
       <p:sp>
         <p:nvSpPr>
@@ -36237,6 +37425,10 @@
             <a:prstDash val="solid"/>
           </a:ln>
         </p:spPr>
+        <p:txBody>
+          <a:bodyPr/>
+          <a:p/>
+        </p:txBody>
       </p:sp>
       <p:sp>
         <p:nvSpPr>
@@ -36381,6 +37573,10 @@
             <a:prstDash val="solid"/>
           </a:ln>
         </p:spPr>
+        <p:txBody>
+          <a:bodyPr/>
+          <a:p/>
+        </p:txBody>
       </p:sp>
       <p:sp>
         <p:nvSpPr>
@@ -36486,6 +37682,10 @@
             <a:prstDash val="solid"/>
           </a:ln>
         </p:spPr>
+        <p:txBody>
+          <a:bodyPr/>
+          <a:p/>
+        </p:txBody>
       </p:sp>
       <p:sp>
         <p:nvSpPr>
@@ -36591,6 +37791,10 @@
             <a:prstDash val="solid"/>
           </a:ln>
         </p:spPr>
+        <p:txBody>
+          <a:bodyPr/>
+          <a:p/>
+        </p:txBody>
       </p:sp>
       <p:sp>
         <p:nvSpPr>
@@ -36696,6 +37900,10 @@
             <a:prstDash val="solid"/>
           </a:ln>
         </p:spPr>
+        <p:txBody>
+          <a:bodyPr/>
+          <a:p/>
+        </p:txBody>
       </p:sp>
       <p:sp>
         <p:nvSpPr>
@@ -36801,6 +38009,10 @@
             <a:prstDash val="solid"/>
           </a:ln>
         </p:spPr>
+        <p:txBody>
+          <a:bodyPr/>
+          <a:p/>
+        </p:txBody>
       </p:sp>
       <p:sp>
         <p:nvSpPr>
@@ -36906,6 +38118,10 @@
             <a:prstDash val="solid"/>
           </a:ln>
         </p:spPr>
+        <p:txBody>
+          <a:bodyPr/>
+          <a:p/>
+        </p:txBody>
       </p:sp>
       <p:sp>
         <p:nvSpPr>
@@ -36968,6 +38184,10 @@
             <a:prstDash val="solid"/>
           </a:ln>
         </p:spPr>
+        <p:txBody>
+          <a:bodyPr/>
+          <a:p/>
+        </p:txBody>
       </p:sp>
       <p:sp>
         <p:nvSpPr>
@@ -36995,6 +38215,10 @@
             <a:prstDash val="solid"/>
           </a:ln>
         </p:spPr>
+        <p:txBody>
+          <a:bodyPr/>
+          <a:p/>
+        </p:txBody>
       </p:sp>
       <p:sp>
         <p:nvSpPr>
@@ -37141,6 +38365,10 @@
             <a:prstDash val="solid"/>
           </a:ln>
         </p:spPr>
+        <p:txBody>
+          <a:bodyPr/>
+          <a:p/>
+        </p:txBody>
       </p:sp>
       <p:sp>
         <p:nvSpPr>
@@ -37425,6 +38653,10 @@
             <a:prstDash val="solid"/>
           </a:ln>
         </p:spPr>
+        <p:txBody>
+          <a:bodyPr/>
+          <a:p/>
+        </p:txBody>
       </p:sp>
       <p:sp>
         <p:nvSpPr>
@@ -37677,6 +38909,10 @@
             <a:prstDash val="solid"/>
           </a:ln>
         </p:spPr>
+        <p:txBody>
+          <a:bodyPr/>
+          <a:p/>
+        </p:txBody>
       </p:sp>
       <p:sp>
         <p:nvSpPr>
@@ -37922,6 +39158,10 @@
             <a:prstDash val="solid"/>
           </a:ln>
         </p:spPr>
+        <p:txBody>
+          <a:bodyPr/>
+          <a:p/>
+        </p:txBody>
       </p:sp>
       <p:sp>
         <p:nvSpPr>
@@ -37981,6 +39221,10 @@
             <a:prstDash val="solid"/>
           </a:ln>
         </p:spPr>
+        <p:txBody>
+          <a:bodyPr/>
+          <a:p/>
+        </p:txBody>
       </p:sp>
       <p:sp>
         <p:nvSpPr>
@@ -38040,6 +39284,10 @@
             <a:prstDash val="solid"/>
           </a:ln>
         </p:spPr>
+        <p:txBody>
+          <a:bodyPr/>
+          <a:p/>
+        </p:txBody>
       </p:sp>
       <p:sp>
         <p:nvSpPr>
@@ -38099,6 +39347,10 @@
             <a:prstDash val="solid"/>
           </a:ln>
         </p:spPr>
+        <p:txBody>
+          <a:bodyPr/>
+          <a:p/>
+        </p:txBody>
       </p:sp>
       <p:sp>
         <p:nvSpPr>
@@ -38158,6 +39410,10 @@
             <a:prstDash val="solid"/>
           </a:ln>
         </p:spPr>
+        <p:txBody>
+          <a:bodyPr/>
+          <a:p/>
+        </p:txBody>
       </p:sp>
       <p:sp>
         <p:nvSpPr>
@@ -38217,6 +39473,10 @@
             <a:prstDash val="solid"/>
           </a:ln>
         </p:spPr>
+        <p:txBody>
+          <a:bodyPr/>
+          <a:p/>
+        </p:txBody>
       </p:sp>
       <p:sp>
         <p:nvSpPr>
@@ -38278,6 +39538,10 @@
             <a:prstDash val="solid"/>
           </a:ln>
         </p:spPr>
+        <p:txBody>
+          <a:bodyPr/>
+          <a:p/>
+        </p:txBody>
       </p:sp>
       <p:sp>
         <p:nvSpPr>
@@ -38303,6 +39567,10 @@
             <a:prstDash val="solid"/>
           </a:ln>
         </p:spPr>
+        <p:txBody>
+          <a:bodyPr/>
+          <a:p/>
+        </p:txBody>
       </p:sp>
       <p:sp>
         <p:nvSpPr>
@@ -38328,6 +39596,10 @@
             <a:prstDash val="solid"/>
           </a:ln>
         </p:spPr>
+        <p:txBody>
+          <a:bodyPr/>
+          <a:p/>
+        </p:txBody>
       </p:sp>
       <p:sp>
         <p:nvSpPr>
@@ -38353,6 +39625,10 @@
             <a:prstDash val="solid"/>
           </a:ln>
         </p:spPr>
+        <p:txBody>
+          <a:bodyPr/>
+          <a:p/>
+        </p:txBody>
       </p:sp>
       <p:sp>
         <p:nvSpPr>
@@ -38378,6 +39654,10 @@
             <a:prstDash val="solid"/>
           </a:ln>
         </p:spPr>
+        <p:txBody>
+          <a:bodyPr/>
+          <a:p/>
+        </p:txBody>
       </p:sp>
       <p:sp>
         <p:nvSpPr>
@@ -38403,6 +39683,10 @@
             <a:prstDash val="solid"/>
           </a:ln>
         </p:spPr>
+        <p:txBody>
+          <a:bodyPr/>
+          <a:p/>
+        </p:txBody>
       </p:sp>
       <p:sp>
         <p:nvSpPr>
@@ -38428,6 +39712,10 @@
             <a:prstDash val="solid"/>
           </a:ln>
         </p:spPr>
+        <p:txBody>
+          <a:bodyPr/>
+          <a:p/>
+        </p:txBody>
       </p:sp>
       <p:sp>
         <p:nvSpPr>
@@ -38494,6 +39782,10 @@
             <a:prstDash val="solid"/>
           </a:ln>
         </p:spPr>
+        <p:txBody>
+          <a:bodyPr/>
+          <a:p/>
+        </p:txBody>
       </p:sp>
       <p:sp>
         <p:nvSpPr>
@@ -38519,6 +39811,10 @@
             <a:prstDash val="solid"/>
           </a:ln>
         </p:spPr>
+        <p:txBody>
+          <a:bodyPr/>
+          <a:p/>
+        </p:txBody>
       </p:sp>
       <p:sp>
         <p:nvSpPr>
@@ -38544,6 +39840,10 @@
             <a:prstDash val="solid"/>
           </a:ln>
         </p:spPr>
+        <p:txBody>
+          <a:bodyPr/>
+          <a:p/>
+        </p:txBody>
       </p:sp>
       <p:sp>
         <p:nvSpPr>
@@ -38569,6 +39869,10 @@
             <a:prstDash val="solid"/>
           </a:ln>
         </p:spPr>
+        <p:txBody>
+          <a:bodyPr/>
+          <a:p/>
+        </p:txBody>
       </p:sp>
       <p:sp>
         <p:nvSpPr>
@@ -38594,6 +39898,10 @@
             <a:prstDash val="solid"/>
           </a:ln>
         </p:spPr>
+        <p:txBody>
+          <a:bodyPr/>
+          <a:p/>
+        </p:txBody>
       </p:sp>
       <p:sp>
         <p:nvSpPr>
@@ -38619,6 +39927,10 @@
             <a:prstDash val="solid"/>
           </a:ln>
         </p:spPr>
+        <p:txBody>
+          <a:bodyPr/>
+          <a:p/>
+        </p:txBody>
       </p:sp>
       <p:sp>
         <p:nvSpPr>
@@ -38644,6 +39956,10 @@
             <a:prstDash val="solid"/>
           </a:ln>
         </p:spPr>
+        <p:txBody>
+          <a:bodyPr/>
+          <a:p/>
+        </p:txBody>
       </p:sp>
       <p:sp>
         <p:nvSpPr>
@@ -38710,6 +40026,10 @@
             <a:prstDash val="solid"/>
           </a:ln>
         </p:spPr>
+        <p:txBody>
+          <a:bodyPr/>
+          <a:p/>
+        </p:txBody>
       </p:sp>
       <p:sp>
         <p:nvSpPr>
@@ -38735,6 +40055,10 @@
             <a:prstDash val="solid"/>
           </a:ln>
         </p:spPr>
+        <p:txBody>
+          <a:bodyPr/>
+          <a:p/>
+        </p:txBody>
       </p:sp>
       <p:sp>
         <p:nvSpPr>
@@ -38760,6 +40084,10 @@
             <a:prstDash val="solid"/>
           </a:ln>
         </p:spPr>
+        <p:txBody>
+          <a:bodyPr/>
+          <a:p/>
+        </p:txBody>
       </p:sp>
       <p:sp>
         <p:nvSpPr>
@@ -38785,6 +40113,10 @@
             <a:prstDash val="solid"/>
           </a:ln>
         </p:spPr>
+        <p:txBody>
+          <a:bodyPr/>
+          <a:p/>
+        </p:txBody>
       </p:sp>
       <p:sp>
         <p:nvSpPr>
@@ -38810,6 +40142,10 @@
             <a:prstDash val="solid"/>
           </a:ln>
         </p:spPr>
+        <p:txBody>
+          <a:bodyPr/>
+          <a:p/>
+        </p:txBody>
       </p:sp>
       <p:sp>
         <p:nvSpPr>
@@ -38835,6 +40171,10 @@
             <a:prstDash val="solid"/>
           </a:ln>
         </p:spPr>
+        <p:txBody>
+          <a:bodyPr/>
+          <a:p/>
+        </p:txBody>
       </p:sp>
       <p:sp>
         <p:nvSpPr>
@@ -38860,6 +40200,10 @@
             <a:prstDash val="solid"/>
           </a:ln>
         </p:spPr>
+        <p:txBody>
+          <a:bodyPr/>
+          <a:p/>
+        </p:txBody>
       </p:sp>
       <p:sp>
         <p:nvSpPr>
@@ -38926,6 +40270,10 @@
             <a:prstDash val="solid"/>
           </a:ln>
         </p:spPr>
+        <p:txBody>
+          <a:bodyPr/>
+          <a:p/>
+        </p:txBody>
       </p:sp>
       <p:sp>
         <p:nvSpPr>
@@ -38951,6 +40299,10 @@
             <a:prstDash val="solid"/>
           </a:ln>
         </p:spPr>
+        <p:txBody>
+          <a:bodyPr/>
+          <a:p/>
+        </p:txBody>
       </p:sp>
       <p:sp>
         <p:nvSpPr>
@@ -38976,6 +40328,10 @@
             <a:prstDash val="solid"/>
           </a:ln>
         </p:spPr>
+        <p:txBody>
+          <a:bodyPr/>
+          <a:p/>
+        </p:txBody>
       </p:sp>
       <p:sp>
         <p:nvSpPr>
@@ -39001,6 +40357,10 @@
             <a:prstDash val="solid"/>
           </a:ln>
         </p:spPr>
+        <p:txBody>
+          <a:bodyPr/>
+          <a:p/>
+        </p:txBody>
       </p:sp>
       <p:sp>
         <p:nvSpPr>
@@ -39026,6 +40386,10 @@
             <a:prstDash val="solid"/>
           </a:ln>
         </p:spPr>
+        <p:txBody>
+          <a:bodyPr/>
+          <a:p/>
+        </p:txBody>
       </p:sp>
       <p:sp>
         <p:nvSpPr>
@@ -39051,6 +40415,10 @@
             <a:prstDash val="solid"/>
           </a:ln>
         </p:spPr>
+        <p:txBody>
+          <a:bodyPr/>
+          <a:p/>
+        </p:txBody>
       </p:sp>
       <p:sp>
         <p:nvSpPr>
@@ -39076,6 +40444,10 @@
             <a:prstDash val="solid"/>
           </a:ln>
         </p:spPr>
+        <p:txBody>
+          <a:bodyPr/>
+          <a:p/>
+        </p:txBody>
       </p:sp>
       <p:sp>
         <p:nvSpPr>
@@ -39142,6 +40514,10 @@
             <a:prstDash val="solid"/>
           </a:ln>
         </p:spPr>
+        <p:txBody>
+          <a:bodyPr/>
+          <a:p/>
+        </p:txBody>
       </p:sp>
       <p:sp>
         <p:nvSpPr>
@@ -39167,6 +40543,10 @@
             <a:prstDash val="solid"/>
           </a:ln>
         </p:spPr>
+        <p:txBody>
+          <a:bodyPr/>
+          <a:p/>
+        </p:txBody>
       </p:sp>
       <p:sp>
         <p:nvSpPr>
@@ -39192,6 +40572,10 @@
             <a:prstDash val="solid"/>
           </a:ln>
         </p:spPr>
+        <p:txBody>
+          <a:bodyPr/>
+          <a:p/>
+        </p:txBody>
       </p:sp>
       <p:sp>
         <p:nvSpPr>
@@ -39217,6 +40601,10 @@
             <a:prstDash val="solid"/>
           </a:ln>
         </p:spPr>
+        <p:txBody>
+          <a:bodyPr/>
+          <a:p/>
+        </p:txBody>
       </p:sp>
       <p:sp>
         <p:nvSpPr>
@@ -39242,6 +40630,10 @@
             <a:prstDash val="solid"/>
           </a:ln>
         </p:spPr>
+        <p:txBody>
+          <a:bodyPr/>
+          <a:p/>
+        </p:txBody>
       </p:sp>
       <p:sp>
         <p:nvSpPr>
@@ -39267,6 +40659,10 @@
             <a:prstDash val="solid"/>
           </a:ln>
         </p:spPr>
+        <p:txBody>
+          <a:bodyPr/>
+          <a:p/>
+        </p:txBody>
       </p:sp>
       <p:sp>
         <p:nvSpPr>
@@ -39292,6 +40688,10 @@
             <a:prstDash val="solid"/>
           </a:ln>
         </p:spPr>
+        <p:txBody>
+          <a:bodyPr/>
+          <a:p/>
+        </p:txBody>
       </p:sp>
       <p:sp>
         <p:nvSpPr>
@@ -39358,6 +40758,10 @@
             <a:prstDash val="solid"/>
           </a:ln>
         </p:spPr>
+        <p:txBody>
+          <a:bodyPr/>
+          <a:p/>
+        </p:txBody>
       </p:sp>
       <p:sp>
         <p:nvSpPr>
@@ -39383,6 +40787,10 @@
             <a:prstDash val="solid"/>
           </a:ln>
         </p:spPr>
+        <p:txBody>
+          <a:bodyPr/>
+          <a:p/>
+        </p:txBody>
       </p:sp>
       <p:sp>
         <p:nvSpPr>
@@ -39408,6 +40816,10 @@
             <a:prstDash val="solid"/>
           </a:ln>
         </p:spPr>
+        <p:txBody>
+          <a:bodyPr/>
+          <a:p/>
+        </p:txBody>
       </p:sp>
       <p:sp>
         <p:nvSpPr>
@@ -39433,6 +40845,10 @@
             <a:prstDash val="solid"/>
           </a:ln>
         </p:spPr>
+        <p:txBody>
+          <a:bodyPr/>
+          <a:p/>
+        </p:txBody>
       </p:sp>
       <p:sp>
         <p:nvSpPr>
@@ -39458,6 +40874,10 @@
             <a:prstDash val="solid"/>
           </a:ln>
         </p:spPr>
+        <p:txBody>
+          <a:bodyPr/>
+          <a:p/>
+        </p:txBody>
       </p:sp>
       <p:sp>
         <p:nvSpPr>
@@ -39483,6 +40903,10 @@
             <a:prstDash val="solid"/>
           </a:ln>
         </p:spPr>
+        <p:txBody>
+          <a:bodyPr/>
+          <a:p/>
+        </p:txBody>
       </p:sp>
       <p:sp>
         <p:nvSpPr>
@@ -39508,6 +40932,10 @@
             <a:prstDash val="solid"/>
           </a:ln>
         </p:spPr>
+        <p:txBody>
+          <a:bodyPr/>
+          <a:p/>
+        </p:txBody>
       </p:sp>
       <p:sp>
         <p:nvSpPr>
@@ -39574,6 +41002,10 @@
             <a:prstDash val="solid"/>
           </a:ln>
         </p:spPr>
+        <p:txBody>
+          <a:bodyPr/>
+          <a:p/>
+        </p:txBody>
       </p:sp>
       <p:sp>
         <p:nvSpPr>
@@ -39640,6 +41072,10 @@
             <a:prstDash val="solid"/>
           </a:ln>
         </p:spPr>
+        <p:txBody>
+          <a:bodyPr/>
+          <a:p/>
+        </p:txBody>
       </p:sp>
       <p:sp>
         <p:nvSpPr>
@@ -39706,6 +41142,10 @@
             <a:prstDash val="solid"/>
           </a:ln>
         </p:spPr>
+        <p:txBody>
+          <a:bodyPr/>
+          <a:p/>
+        </p:txBody>
       </p:sp>
       <p:sp>
         <p:nvSpPr>
@@ -39772,6 +41212,10 @@
             <a:prstDash val="solid"/>
           </a:ln>
         </p:spPr>
+        <p:txBody>
+          <a:bodyPr/>
+          <a:p/>
+        </p:txBody>
       </p:sp>
       <p:sp>
         <p:nvSpPr>
@@ -39838,6 +41282,10 @@
             <a:prstDash val="solid"/>
           </a:ln>
         </p:spPr>
+        <p:txBody>
+          <a:bodyPr/>
+          <a:p/>
+        </p:txBody>
       </p:sp>
       <p:sp>
         <p:nvSpPr>
@@ -39904,6 +41352,10 @@
             <a:prstDash val="solid"/>
           </a:ln>
         </p:spPr>
+        <p:txBody>
+          <a:bodyPr/>
+          <a:p/>
+        </p:txBody>
       </p:sp>
       <p:sp>
         <p:nvSpPr>
@@ -39970,6 +41422,10 @@
             <a:prstDash val="solid"/>
           </a:ln>
         </p:spPr>
+        <p:txBody>
+          <a:bodyPr/>
+          <a:p/>
+        </p:txBody>
       </p:sp>
       <p:sp>
         <p:nvSpPr>
@@ -40036,6 +41492,10 @@
             <a:prstDash val="solid"/>
           </a:ln>
         </p:spPr>
+        <p:txBody>
+          <a:bodyPr/>
+          <a:p/>
+        </p:txBody>
       </p:sp>
       <p:sp>
         <p:nvSpPr>
@@ -40102,6 +41562,10 @@
             <a:prstDash val="solid"/>
           </a:ln>
         </p:spPr>
+        <p:txBody>
+          <a:bodyPr/>
+          <a:p/>
+        </p:txBody>
       </p:sp>
       <p:sp>
         <p:nvSpPr>
@@ -40168,6 +41632,10 @@
             <a:prstDash val="solid"/>
           </a:ln>
         </p:spPr>
+        <p:txBody>
+          <a:bodyPr/>
+          <a:p/>
+        </p:txBody>
       </p:sp>
       <p:sp>
         <p:nvSpPr>
@@ -40234,6 +41702,10 @@
             <a:prstDash val="solid"/>
           </a:ln>
         </p:spPr>
+        <p:txBody>
+          <a:bodyPr/>
+          <a:p/>
+        </p:txBody>
       </p:sp>
       <p:sp>
         <p:nvSpPr>
@@ -40300,6 +41772,10 @@
             <a:prstDash val="solid"/>
           </a:ln>
         </p:spPr>
+        <p:txBody>
+          <a:bodyPr/>
+          <a:p/>
+        </p:txBody>
       </p:sp>
       <p:sp>
         <p:nvSpPr>
@@ -40366,6 +41842,10 @@
             <a:prstDash val="solid"/>
           </a:ln>
         </p:spPr>
+        <p:txBody>
+          <a:bodyPr/>
+          <a:p/>
+        </p:txBody>
       </p:sp>
       <p:sp>
         <p:nvSpPr>
@@ -40432,6 +41912,10 @@
             <a:prstDash val="solid"/>
           </a:ln>
         </p:spPr>
+        <p:txBody>
+          <a:bodyPr/>
+          <a:p/>
+        </p:txBody>
       </p:sp>
       <p:sp>
         <p:nvSpPr>
@@ -40498,6 +41982,10 @@
             <a:prstDash val="solid"/>
           </a:ln>
         </p:spPr>
+        <p:txBody>
+          <a:bodyPr/>
+          <a:p/>
+        </p:txBody>
       </p:sp>
       <p:sp>
         <p:nvSpPr>
@@ -40564,6 +42052,10 @@
             <a:prstDash val="solid"/>
           </a:ln>
         </p:spPr>
+        <p:txBody>
+          <a:bodyPr/>
+          <a:p/>
+        </p:txBody>
       </p:sp>
       <p:sp>
         <p:nvSpPr>
@@ -40630,6 +42122,10 @@
             <a:prstDash val="solid"/>
           </a:ln>
         </p:spPr>
+        <p:txBody>
+          <a:bodyPr/>
+          <a:p/>
+        </p:txBody>
       </p:sp>
       <p:sp>
         <p:nvSpPr>
@@ -40696,6 +42192,10 @@
             <a:prstDash val="solid"/>
           </a:ln>
         </p:spPr>
+        <p:txBody>
+          <a:bodyPr/>
+          <a:p/>
+        </p:txBody>
       </p:sp>
       <p:sp>
         <p:nvSpPr>
@@ -40762,6 +42262,10 @@
             <a:prstDash val="solid"/>
           </a:ln>
         </p:spPr>
+        <p:txBody>
+          <a:bodyPr/>
+          <a:p/>
+        </p:txBody>
       </p:sp>
       <p:sp>
         <p:nvSpPr>
@@ -40828,6 +42332,10 @@
             <a:prstDash val="solid"/>
           </a:ln>
         </p:spPr>
+        <p:txBody>
+          <a:bodyPr/>
+          <a:p/>
+        </p:txBody>
       </p:sp>
       <p:sp>
         <p:nvSpPr>
@@ -40894,6 +42402,10 @@
             <a:prstDash val="solid"/>
           </a:ln>
         </p:spPr>
+        <p:txBody>
+          <a:bodyPr/>
+          <a:p/>
+        </p:txBody>
       </p:sp>
       <p:sp>
         <p:nvSpPr>
@@ -41044,6 +42556,10 @@
             <a:prstDash val="solid"/>
           </a:ln>
         </p:spPr>
+        <p:txBody>
+          <a:bodyPr/>
+          <a:p/>
+        </p:txBody>
       </p:sp>
       <p:sp>
         <p:nvSpPr>
@@ -41296,6 +42812,10 @@
             <a:prstDash val="solid"/>
           </a:ln>
         </p:spPr>
+        <p:txBody>
+          <a:bodyPr/>
+          <a:p/>
+        </p:txBody>
       </p:sp>
       <p:sp>
         <p:nvSpPr>
@@ -41401,6 +42921,10 @@
             <a:prstDash val="solid"/>
           </a:ln>
         </p:spPr>
+        <p:txBody>
+          <a:bodyPr/>
+          <a:p/>
+        </p:txBody>
       </p:sp>
       <p:sp>
         <p:nvSpPr>
@@ -41547,6 +43071,10 @@
             <a:prstDash val="solid"/>
           </a:ln>
         </p:spPr>
+        <p:txBody>
+          <a:bodyPr/>
+          <a:p/>
+        </p:txBody>
       </p:sp>
       <p:sp>
         <p:nvSpPr>
@@ -41693,6 +43221,10 @@
             <a:prstDash val="solid"/>
           </a:ln>
         </p:spPr>
+        <p:txBody>
+          <a:bodyPr/>
+          <a:p/>
+        </p:txBody>
       </p:sp>
       <p:sp>
         <p:nvSpPr>
@@ -41839,6 +43371,10 @@
             <a:prstDash val="solid"/>
           </a:ln>
         </p:spPr>
+        <p:txBody>
+          <a:bodyPr/>
+          <a:p/>
+        </p:txBody>
       </p:sp>
       <p:sp>
         <p:nvSpPr>
@@ -41983,6 +43519,10 @@
             <a:prstDash val="solid"/>
           </a:ln>
         </p:spPr>
+        <p:txBody>
+          <a:bodyPr/>
+          <a:p/>
+        </p:txBody>
       </p:sp>
       <p:sp>
         <p:nvSpPr>
@@ -42080,6 +43620,10 @@
             <a:prstDash val="solid"/>
           </a:ln>
         </p:spPr>
+        <p:txBody>
+          <a:bodyPr/>
+          <a:p/>
+        </p:txBody>
       </p:sp>
       <p:sp>
         <p:nvSpPr>
@@ -42143,6 +43687,10 @@
             <a:prstDash val="solid"/>
           </a:ln>
         </p:spPr>
+        <p:txBody>
+          <a:bodyPr/>
+          <a:p/>
+        </p:txBody>
       </p:sp>
       <p:sp>
         <p:nvSpPr>
@@ -42206,6 +43754,10 @@
             <a:prstDash val="solid"/>
           </a:ln>
         </p:spPr>
+        <p:txBody>
+          <a:bodyPr/>
+          <a:p/>
+        </p:txBody>
       </p:sp>
       <p:sp>
         <p:nvSpPr>
@@ -42269,6 +43821,10 @@
             <a:prstDash val="solid"/>
           </a:ln>
         </p:spPr>
+        <p:txBody>
+          <a:bodyPr/>
+          <a:p/>
+        </p:txBody>
       </p:sp>
       <p:sp>
         <p:nvSpPr>
@@ -42332,6 +43888,10 @@
             <a:prstDash val="solid"/>
           </a:ln>
         </p:spPr>
+        <p:txBody>
+          <a:bodyPr/>
+          <a:p/>
+        </p:txBody>
       </p:sp>
       <p:sp>
         <p:nvSpPr>
@@ -42395,6 +43955,10 @@
             <a:prstDash val="solid"/>
           </a:ln>
         </p:spPr>
+        <p:txBody>
+          <a:bodyPr/>
+          <a:p/>
+        </p:txBody>
       </p:sp>
       <p:sp>
         <p:nvSpPr>
@@ -42598,6 +44162,10 @@
             <a:prstDash val="solid"/>
           </a:ln>
         </p:spPr>
+        <p:txBody>
+          <a:bodyPr/>
+          <a:p/>
+        </p:txBody>
       </p:sp>
       <p:sp>
         <p:nvSpPr>
@@ -42850,6 +44418,10 @@
             <a:prstDash val="solid"/>
           </a:ln>
         </p:spPr>
+        <p:txBody>
+          <a:bodyPr/>
+          <a:p/>
+        </p:txBody>
       </p:sp>
       <p:sp>
         <p:nvSpPr>
@@ -42994,6 +44566,10 @@
             <a:prstDash val="solid"/>
           </a:ln>
         </p:spPr>
+        <p:txBody>
+          <a:bodyPr/>
+          <a:p/>
+        </p:txBody>
       </p:sp>
       <p:sp>
         <p:nvSpPr>
@@ -43099,6 +44675,10 @@
             <a:prstDash val="solid"/>
           </a:ln>
         </p:spPr>
+        <p:txBody>
+          <a:bodyPr/>
+          <a:p/>
+        </p:txBody>
       </p:sp>
       <p:sp>
         <p:nvSpPr>
@@ -43204,6 +44784,10 @@
             <a:prstDash val="solid"/>
           </a:ln>
         </p:spPr>
+        <p:txBody>
+          <a:bodyPr/>
+          <a:p/>
+        </p:txBody>
       </p:sp>
       <p:sp>
         <p:nvSpPr>
@@ -43309,6 +44893,10 @@
             <a:prstDash val="solid"/>
           </a:ln>
         </p:spPr>
+        <p:txBody>
+          <a:bodyPr/>
+          <a:p/>
+        </p:txBody>
       </p:sp>
       <p:sp>
         <p:nvSpPr>
@@ -43414,6 +45002,10 @@
             <a:prstDash val="solid"/>
           </a:ln>
         </p:spPr>
+        <p:txBody>
+          <a:bodyPr/>
+          <a:p/>
+        </p:txBody>
       </p:sp>
       <p:sp>
         <p:nvSpPr>
@@ -43519,6 +45111,10 @@
             <a:prstDash val="solid"/>
           </a:ln>
         </p:spPr>
+        <p:txBody>
+          <a:bodyPr/>
+          <a:p/>
+        </p:txBody>
       </p:sp>
       <p:sp>
         <p:nvSpPr>
@@ -43624,6 +45220,10 @@
             <a:prstDash val="solid"/>
           </a:ln>
         </p:spPr>
+        <p:txBody>
+          <a:bodyPr/>
+          <a:p/>
+        </p:txBody>
       </p:sp>
       <p:sp>
         <p:nvSpPr>
@@ -43729,6 +45329,10 @@
             <a:prstDash val="solid"/>
           </a:ln>
         </p:spPr>
+        <p:txBody>
+          <a:bodyPr/>
+          <a:p/>
+        </p:txBody>
       </p:sp>
       <p:sp>
         <p:nvSpPr>
@@ -43834,6 +45438,10 @@
             <a:prstDash val="solid"/>
           </a:ln>
         </p:spPr>
+        <p:txBody>
+          <a:bodyPr/>
+          <a:p/>
+        </p:txBody>
       </p:sp>
       <p:sp>
         <p:nvSpPr>
@@ -43939,6 +45547,10 @@
             <a:prstDash val="solid"/>
           </a:ln>
         </p:spPr>
+        <p:txBody>
+          <a:bodyPr/>
+          <a:p/>
+        </p:txBody>
       </p:sp>
       <p:sp>
         <p:nvSpPr>
@@ -44044,6 +45656,10 @@
             <a:prstDash val="solid"/>
           </a:ln>
         </p:spPr>
+        <p:txBody>
+          <a:bodyPr/>
+          <a:p/>
+        </p:txBody>
       </p:sp>
       <p:sp>
         <p:nvSpPr>
@@ -44149,6 +45765,10 @@
             <a:prstDash val="solid"/>
           </a:ln>
         </p:spPr>
+        <p:txBody>
+          <a:bodyPr/>
+          <a:p/>
+        </p:txBody>
       </p:sp>
       <p:sp>
         <p:nvSpPr>
@@ -44211,6 +45831,10 @@
             <a:prstDash val="solid"/>
           </a:ln>
         </p:spPr>
+        <p:txBody>
+          <a:bodyPr/>
+          <a:p/>
+        </p:txBody>
       </p:sp>
       <p:sp>
         <p:nvSpPr>
@@ -44391,6 +46015,10 @@
             <a:prstDash val="solid"/>
           </a:ln>
         </p:spPr>
+        <p:txBody>
+          <a:bodyPr/>
+          <a:p/>
+        </p:txBody>
       </p:sp>
       <p:sp>
         <p:nvSpPr>
@@ -44643,6 +46271,10 @@
             <a:prstDash val="solid"/>
           </a:ln>
         </p:spPr>
+        <p:txBody>
+          <a:bodyPr/>
+          <a:p/>
+        </p:txBody>
       </p:sp>
       <p:sp>
         <p:nvSpPr>
@@ -44787,6 +46419,10 @@
             <a:prstDash val="solid"/>
           </a:ln>
         </p:spPr>
+        <p:txBody>
+          <a:bodyPr/>
+          <a:p/>
+        </p:txBody>
       </p:sp>
       <p:sp>
         <p:nvSpPr>
@@ -44892,6 +46528,10 @@
             <a:prstDash val="solid"/>
           </a:ln>
         </p:spPr>
+        <p:txBody>
+          <a:bodyPr/>
+          <a:p/>
+        </p:txBody>
       </p:sp>
       <p:sp>
         <p:nvSpPr>
@@ -44997,6 +46637,10 @@
             <a:prstDash val="solid"/>
           </a:ln>
         </p:spPr>
+        <p:txBody>
+          <a:bodyPr/>
+          <a:p/>
+        </p:txBody>
       </p:sp>
       <p:sp>
         <p:nvSpPr>
@@ -45102,6 +46746,10 @@
             <a:prstDash val="solid"/>
           </a:ln>
         </p:spPr>
+        <p:txBody>
+          <a:bodyPr/>
+          <a:p/>
+        </p:txBody>
       </p:sp>
       <p:sp>
         <p:nvSpPr>
@@ -45207,6 +46855,10 @@
             <a:prstDash val="solid"/>
           </a:ln>
         </p:spPr>
+        <p:txBody>
+          <a:bodyPr/>
+          <a:p/>
+        </p:txBody>
       </p:sp>
       <p:sp>
         <p:nvSpPr>
@@ -45312,6 +46964,10 @@
             <a:prstDash val="solid"/>
           </a:ln>
         </p:spPr>
+        <p:txBody>
+          <a:bodyPr/>
+          <a:p/>
+        </p:txBody>
       </p:sp>
       <p:sp>
         <p:nvSpPr>
@@ -45374,6 +47030,10 @@
             <a:prstDash val="solid"/>
           </a:ln>
         </p:spPr>
+        <p:txBody>
+          <a:bodyPr/>
+          <a:p/>
+        </p:txBody>
       </p:sp>
       <p:sp>
         <p:nvSpPr>
@@ -45440,6 +47100,10 @@
             <a:prstDash val="solid"/>
           </a:ln>
         </p:spPr>
+        <p:txBody>
+          <a:bodyPr/>
+          <a:p/>
+        </p:txBody>
       </p:sp>
       <p:sp>
         <p:nvSpPr>
@@ -45545,6 +47209,10 @@
             <a:prstDash val="solid"/>
           </a:ln>
         </p:spPr>
+        <p:txBody>
+          <a:bodyPr/>
+          <a:p/>
+        </p:txBody>
       </p:sp>
       <p:sp>
         <p:nvSpPr>
@@ -45650,6 +47318,10 @@
             <a:prstDash val="solid"/>
           </a:ln>
         </p:spPr>
+        <p:txBody>
+          <a:bodyPr/>
+          <a:p/>
+        </p:txBody>
       </p:sp>
       <p:sp>
         <p:nvSpPr>
@@ -45755,6 +47427,10 @@
             <a:prstDash val="solid"/>
           </a:ln>
         </p:spPr>
+        <p:txBody>
+          <a:bodyPr/>
+          <a:p/>
+        </p:txBody>
       </p:sp>
       <p:sp>
         <p:nvSpPr>
@@ -45860,6 +47536,10 @@
             <a:prstDash val="solid"/>
           </a:ln>
         </p:spPr>
+        <p:txBody>
+          <a:bodyPr/>
+          <a:p/>
+        </p:txBody>
       </p:sp>
       <p:sp>
         <p:nvSpPr>
@@ -45965,6 +47645,10 @@
             <a:prstDash val="solid"/>
           </a:ln>
         </p:spPr>
+        <p:txBody>
+          <a:bodyPr/>
+          <a:p/>
+        </p:txBody>
       </p:sp>
       <p:sp>
         <p:nvSpPr>
@@ -46027,6 +47711,10 @@
             <a:prstDash val="solid"/>
           </a:ln>
         </p:spPr>
+        <p:txBody>
+          <a:bodyPr/>
+          <a:p/>
+        </p:txBody>
       </p:sp>
       <p:sp>
         <p:nvSpPr>
@@ -46207,6 +47895,10 @@
             <a:prstDash val="solid"/>
           </a:ln>
         </p:spPr>
+        <p:txBody>
+          <a:bodyPr/>
+          <a:p/>
+        </p:txBody>
       </p:sp>
       <p:sp>
         <p:nvSpPr>
@@ -46459,6 +48151,10 @@
             <a:prstDash val="solid"/>
           </a:ln>
         </p:spPr>
+        <p:txBody>
+          <a:bodyPr/>
+          <a:p/>
+        </p:txBody>
       </p:sp>
       <p:sp>
         <p:nvSpPr>
@@ -46603,6 +48299,10 @@
             <a:prstDash val="solid"/>
           </a:ln>
         </p:spPr>
+        <p:txBody>
+          <a:bodyPr/>
+          <a:p/>
+        </p:txBody>
       </p:sp>
       <p:sp>
         <p:nvSpPr>
@@ -46708,6 +48408,10 @@
             <a:prstDash val="solid"/>
           </a:ln>
         </p:spPr>
+        <p:txBody>
+          <a:bodyPr/>
+          <a:p/>
+        </p:txBody>
       </p:sp>
       <p:sp>
         <p:nvSpPr>
@@ -46813,6 +48517,10 @@
             <a:prstDash val="solid"/>
           </a:ln>
         </p:spPr>
+        <p:txBody>
+          <a:bodyPr/>
+          <a:p/>
+        </p:txBody>
       </p:sp>
       <p:sp>
         <p:nvSpPr>
@@ -46918,6 +48626,10 @@
             <a:prstDash val="solid"/>
           </a:ln>
         </p:spPr>
+        <p:txBody>
+          <a:bodyPr/>
+          <a:p/>
+        </p:txBody>
       </p:sp>
       <p:sp>
         <p:nvSpPr>
@@ -47023,6 +48735,10 @@
             <a:prstDash val="solid"/>
           </a:ln>
         </p:spPr>
+        <p:txBody>
+          <a:bodyPr/>
+          <a:p/>
+        </p:txBody>
       </p:sp>
       <p:sp>
         <p:nvSpPr>
@@ -47128,6 +48844,10 @@
             <a:prstDash val="solid"/>
           </a:ln>
         </p:spPr>
+        <p:txBody>
+          <a:bodyPr/>
+          <a:p/>
+        </p:txBody>
       </p:sp>
       <p:sp>
         <p:nvSpPr>
@@ -47233,6 +48953,10 @@
             <a:prstDash val="solid"/>
           </a:ln>
         </p:spPr>
+        <p:txBody>
+          <a:bodyPr/>
+          <a:p/>
+        </p:txBody>
       </p:sp>
       <p:sp>
         <p:nvSpPr>
@@ -47338,6 +49062,10 @@
             <a:prstDash val="solid"/>
           </a:ln>
         </p:spPr>
+        <p:txBody>
+          <a:bodyPr/>
+          <a:p/>
+        </p:txBody>
       </p:sp>
       <p:sp>
         <p:nvSpPr>
@@ -47443,6 +49171,10 @@
             <a:prstDash val="solid"/>
           </a:ln>
         </p:spPr>
+        <p:txBody>
+          <a:bodyPr/>
+          <a:p/>
+        </p:txBody>
       </p:sp>
       <p:sp>
         <p:nvSpPr>
@@ -47548,6 +49280,10 @@
             <a:prstDash val="solid"/>
           </a:ln>
         </p:spPr>
+        <p:txBody>
+          <a:bodyPr/>
+          <a:p/>
+        </p:txBody>
       </p:sp>
       <p:sp>
         <p:nvSpPr>
@@ -47653,6 +49389,10 @@
             <a:prstDash val="solid"/>
           </a:ln>
         </p:spPr>
+        <p:txBody>
+          <a:bodyPr/>
+          <a:p/>
+        </p:txBody>
       </p:sp>
       <p:sp>
         <p:nvSpPr>
@@ -47758,6 +49498,10 @@
             <a:prstDash val="solid"/>
           </a:ln>
         </p:spPr>
+        <p:txBody>
+          <a:bodyPr/>
+          <a:p/>
+        </p:txBody>
       </p:sp>
       <p:sp>
         <p:nvSpPr>
@@ -47820,6 +49564,10 @@
             <a:prstDash val="solid"/>
           </a:ln>
         </p:spPr>
+        <p:txBody>
+          <a:bodyPr/>
+          <a:p/>
+        </p:txBody>
       </p:sp>
       <p:sp>
         <p:nvSpPr>
@@ -48000,6 +49748,10 @@
             <a:prstDash val="solid"/>
           </a:ln>
         </p:spPr>
+        <p:txBody>
+          <a:bodyPr/>
+          <a:p/>
+        </p:txBody>
       </p:sp>
       <p:sp>
         <p:nvSpPr>
